--- a/amd-presentation-draft.pptx
+++ b/amd-presentation-draft.pptx
@@ -3161,76 +3161,8 @@
         </p:nvSpPr>
         <p:spPr>
           <a:xfrm>
-            <a:off x="868680" y="914400"/>
-            <a:ext cx="7589520" cy="1005840"/>
-          </a:xfrm>
-          <a:prstGeom prst="rect">
-            <a:avLst/>
-          </a:prstGeom>
-          <a:noFill/>
-        </p:spPr>
-        <p:txBody>
-          <a:bodyPr wrap="none">
-            <a:spAutoFit/>
-          </a:bodyPr>
-          <a:lstStyle/>
-          <a:p>
-            <a:r>
-              <a:rPr sz="3000" b="1">
-                <a:solidFill>
-                  <a:srgbClr val="FFFFFF"/>
-                </a:solidFill>
-                <a:latin typeface="Arial"/>
-              </a:rPr>
-              <a:t>Acid Mine Drainage (AMD)</a:t>
-            </a:r>
-          </a:p>
-        </p:txBody>
-      </p:sp>
-      <p:sp>
-        <p:nvSpPr>
-          <p:cNvPr id="4" name="TextBox 3"/>
-          <p:cNvSpPr txBox="1"/>
-          <p:nvPr/>
-        </p:nvSpPr>
-        <p:spPr>
-          <a:xfrm>
-            <a:off x="868680" y="1828800"/>
-            <a:ext cx="7955279" cy="1097280"/>
-          </a:xfrm>
-          <a:prstGeom prst="rect">
-            <a:avLst/>
-          </a:prstGeom>
-          <a:noFill/>
-        </p:spPr>
-        <p:txBody>
-          <a:bodyPr wrap="none">
-            <a:spAutoFit/>
-          </a:bodyPr>
-          <a:lstStyle/>
-          <a:p>
-            <a:r>
-              <a:rPr sz="1900">
-                <a:solidFill>
-                  <a:srgbClr val="E5E7EB"/>
-                </a:solidFill>
-                <a:latin typeface="Arial"/>
-              </a:rPr>
-              <a:t>Draft presentation covering environmental risk, energy supply chain impacts, treatment technologies, economics, regulation, and case studies.</a:t>
-            </a:r>
-          </a:p>
-        </p:txBody>
-      </p:sp>
-      <p:sp>
-        <p:nvSpPr>
-          <p:cNvPr id="5" name="TextBox 4"/>
-          <p:cNvSpPr txBox="1"/>
-          <p:nvPr/>
-        </p:nvSpPr>
-        <p:spPr>
-          <a:xfrm>
-            <a:off x="868680" y="3063240"/>
-            <a:ext cx="9875520" cy="1463040"/>
+            <a:off x="868680" y="868680"/>
+            <a:ext cx="7955279" cy="1051560"/>
           </a:xfrm>
           <a:prstGeom prst="rect">
             <a:avLst/>
@@ -3243,97 +3175,29 @@
           </a:bodyPr>
           <a:lstStyle/>
           <a:p>
-            <a:pPr>
-              <a:spcAft>
-                <a:spcPts val="1000"/>
-              </a:spcAft>
-            </a:pPr>
-            <a:r>
-              <a:rPr sz="1800" b="1">
-                <a:solidFill>
-                  <a:srgbClr val="FDBA74"/>
-                </a:solidFill>
-                <a:latin typeface="Arial"/>
-              </a:rPr>
-              <a:t>Energy supply chain</a:t>
-            </a:r>
-          </a:p>
-          <a:p>
-            <a:pPr>
-              <a:spcAft>
-                <a:spcPts val="1000"/>
-              </a:spcAft>
-            </a:pPr>
-            <a:r>
-              <a:rPr sz="1800" b="1">
-                <a:solidFill>
-                  <a:srgbClr val="FDBA74"/>
-                </a:solidFill>
-                <a:latin typeface="Arial"/>
-              </a:rPr>
-              <a:t>Technology approaches</a:t>
-            </a:r>
-          </a:p>
-          <a:p>
-            <a:pPr>
-              <a:spcAft>
-                <a:spcPts val="1000"/>
-              </a:spcAft>
-            </a:pPr>
-            <a:r>
-              <a:rPr sz="1800" b="1">
-                <a:solidFill>
-                  <a:srgbClr val="FDBA74"/>
-                </a:solidFill>
-                <a:latin typeface="Arial"/>
-              </a:rPr>
-              <a:t>Economics / costs / financing</a:t>
-            </a:r>
-          </a:p>
-          <a:p>
-            <a:pPr>
-              <a:spcAft>
-                <a:spcPts val="1000"/>
-              </a:spcAft>
-            </a:pPr>
-            <a:r>
-              <a:rPr sz="1800" b="1">
-                <a:solidFill>
-                  <a:srgbClr val="FDBA74"/>
-                </a:solidFill>
-                <a:latin typeface="Arial"/>
-              </a:rPr>
-              <a:t>Laws and regulations</a:t>
-            </a:r>
-          </a:p>
-          <a:p>
-            <a:pPr>
-              <a:spcAft>
-                <a:spcPts val="1000"/>
-              </a:spcAft>
-            </a:pPr>
-            <a:r>
-              <a:rPr sz="1800" b="1">
-                <a:solidFill>
-                  <a:srgbClr val="FDBA74"/>
-                </a:solidFill>
-                <a:latin typeface="Arial"/>
-              </a:rPr>
-              <a:t>Example cases</a:t>
-            </a:r>
-          </a:p>
-        </p:txBody>
-      </p:sp>
-      <p:sp>
-        <p:nvSpPr>
-          <p:cNvPr id="6" name="TextBox 5"/>
-          <p:cNvSpPr txBox="1"/>
-          <p:nvPr/>
-        </p:nvSpPr>
-        <p:spPr>
-          <a:xfrm>
-            <a:off x="7955279" y="914400"/>
-            <a:ext cx="2834640" cy="3931920"/>
+            <a:pPr algn="l"/>
+            <a:r>
+              <a:rPr sz="2800" b="1">
+                <a:solidFill>
+                  <a:srgbClr val="FFFFFF"/>
+                </a:solidFill>
+                <a:latin typeface="Arial"/>
+              </a:rPr>
+              <a:t>Acid Mine Drainage (AMD): An Environmental Challenge in Mining Supply Chains</a:t>
+            </a:r>
+          </a:p>
+        </p:txBody>
+      </p:sp>
+      <p:sp>
+        <p:nvSpPr>
+          <p:cNvPr id="4" name="TextBox 3"/>
+          <p:cNvSpPr txBox="1"/>
+          <p:nvPr/>
+        </p:nvSpPr>
+        <p:spPr>
+          <a:xfrm>
+            <a:off x="896112" y="1847088"/>
+            <a:ext cx="6949440" cy="960120"/>
           </a:xfrm>
           <a:prstGeom prst="rect">
             <a:avLst/>
@@ -3346,37 +3210,39 @@
           </a:bodyPr>
           <a:lstStyle/>
           <a:p>
-            <a:r>
-              <a:rPr sz="1800" b="1">
-                <a:solidFill>
-                  <a:srgbClr val="FFFFFF"/>
-                </a:solidFill>
-                <a:latin typeface="Arial"/>
-              </a:rPr>
-              <a:t>Key message:
-AMD is both a long-tail water liability and an emerging critical-minerals recovery opportunity.</a:t>
-            </a:r>
-          </a:p>
-        </p:txBody>
-      </p:sp>
-      <p:sp>
-        <p:nvSpPr>
-          <p:cNvPr id="7" name="Rounded Rectangle 6"/>
+            <a:pPr algn="l"/>
+            <a:r>
+              <a:rPr sz="1800" b="0">
+                <a:solidFill>
+                  <a:srgbClr val="E5E7EB"/>
+                </a:solidFill>
+                <a:latin typeface="Arial"/>
+              </a:rPr>
+              <a:t>CEE 304 presentation focused on how mining chemistry creates long-term water pollution and cleanup obligations.</a:t>
+            </a:r>
+          </a:p>
+        </p:txBody>
+      </p:sp>
+      <p:sp>
+        <p:nvSpPr>
+          <p:cNvPr id="5" name="Rounded Rectangle 4"/>
           <p:cNvSpPr/>
           <p:nvPr/>
         </p:nvSpPr>
         <p:spPr>
           <a:xfrm>
-            <a:off x="7818120" y="4480560"/>
-            <a:ext cx="3063240" cy="914400"/>
+            <a:off x="8092440" y="868680"/>
+            <a:ext cx="2697480" cy="2331720"/>
           </a:xfrm>
           <a:prstGeom prst="roundRect">
-            <a:avLst/>
+            <a:avLst>
+              <a:gd name="adj" fmla="val 8000"/>
+            </a:avLst>
           </a:prstGeom>
           <a:solidFill>
-            <a:srgbClr val="301709"/>
+            <a:srgbClr val="20150C"/>
           </a:solidFill>
-          <a:ln>
+          <a:ln w="12700">
             <a:solidFill>
               <a:srgbClr val="F97316"/>
             </a:solidFill>
@@ -3406,14 +3272,14 @@
       </p:sp>
       <p:sp>
         <p:nvSpPr>
-          <p:cNvPr id="8" name="TextBox 7"/>
-          <p:cNvSpPr txBox="1"/>
-          <p:nvPr/>
-        </p:nvSpPr>
-        <p:spPr>
-          <a:xfrm>
-            <a:off x="7973568" y="4700016"/>
-            <a:ext cx="2788920" cy="457200"/>
+          <p:cNvPr id="6" name="TextBox 5"/>
+          <p:cNvSpPr txBox="1"/>
+          <p:nvPr/>
+        </p:nvSpPr>
+        <p:spPr>
+          <a:xfrm>
+            <a:off x="8257032" y="978408"/>
+            <a:ext cx="2368296" cy="274320"/>
           </a:xfrm>
           <a:prstGeom prst="rect">
             <a:avLst/>
@@ -3426,22 +3292,392 @@
           </a:bodyPr>
           <a:lstStyle/>
           <a:p>
+            <a:r>
+              <a:rPr sz="1500" b="1">
+                <a:solidFill>
+                  <a:srgbClr val="FDBA74"/>
+                </a:solidFill>
+                <a:latin typeface="Arial"/>
+              </a:rPr>
+              <a:t>Class details</a:t>
+            </a:r>
+          </a:p>
+        </p:txBody>
+      </p:sp>
+      <p:sp>
+        <p:nvSpPr>
+          <p:cNvPr id="7" name="TextBox 6"/>
+          <p:cNvSpPr txBox="1"/>
+          <p:nvPr/>
+        </p:nvSpPr>
+        <p:spPr>
+          <a:xfrm>
+            <a:off x="8321040" y="1298448"/>
+            <a:ext cx="2240280" cy="1554480"/>
+          </a:xfrm>
+          <a:prstGeom prst="rect">
+            <a:avLst/>
+          </a:prstGeom>
+          <a:noFill/>
+        </p:spPr>
+        <p:txBody>
+          <a:bodyPr wrap="square">
+            <a:noAutofit/>
+          </a:bodyPr>
+          <a:lstStyle/>
+          <a:p>
+            <a:pPr>
+              <a:spcAft>
+                <a:spcPts val="600"/>
+              </a:spcAft>
+            </a:pPr>
+            <a:r>
+              <a:rPr sz="1500">
+                <a:solidFill>
+                  <a:srgbClr val="E5E7EB"/>
+                </a:solidFill>
+                <a:latin typeface="Arial"/>
+              </a:rPr>
+              <a:t>Group 7</a:t>
+            </a:r>
+          </a:p>
+          <a:p>
+            <a:pPr>
+              <a:spcAft>
+                <a:spcPts val="600"/>
+              </a:spcAft>
+            </a:pPr>
+            <a:r>
+              <a:rPr sz="1500">
+                <a:solidFill>
+                  <a:srgbClr val="E5E7EB"/>
+                </a:solidFill>
+                <a:latin typeface="Arial"/>
+              </a:rPr>
+              <a:t>Professor Peters</a:t>
+            </a:r>
+          </a:p>
+          <a:p>
+            <a:pPr>
+              <a:spcAft>
+                <a:spcPts val="600"/>
+              </a:spcAft>
+            </a:pPr>
+            <a:r>
+              <a:rPr sz="1500">
+                <a:solidFill>
+                  <a:srgbClr val="E5E7EB"/>
+                </a:solidFill>
+                <a:latin typeface="Arial"/>
+              </a:rPr>
+              <a:t>CEE 304</a:t>
+            </a:r>
+          </a:p>
+          <a:p>
+            <a:pPr>
+              <a:spcAft>
+                <a:spcPts val="600"/>
+              </a:spcAft>
+            </a:pPr>
+            <a:r>
+              <a:rPr sz="1500">
+                <a:solidFill>
+                  <a:srgbClr val="E5E7EB"/>
+                </a:solidFill>
+                <a:latin typeface="Arial"/>
+              </a:rPr>
+              <a:t>Apr. 13, 2026</a:t>
+            </a:r>
+          </a:p>
+        </p:txBody>
+      </p:sp>
+      <p:sp>
+        <p:nvSpPr>
+          <p:cNvPr id="8" name="Rounded Rectangle 7"/>
+          <p:cNvSpPr/>
+          <p:nvPr/>
+        </p:nvSpPr>
+        <p:spPr>
+          <a:xfrm>
+            <a:off x="868680" y="2971800"/>
+            <a:ext cx="5486400" cy="2148840"/>
+          </a:xfrm>
+          <a:prstGeom prst="roundRect">
+            <a:avLst>
+              <a:gd name="adj" fmla="val 8000"/>
+            </a:avLst>
+          </a:prstGeom>
+          <a:solidFill>
+            <a:srgbClr val="111827"/>
+          </a:solidFill>
+          <a:ln w="12700">
+            <a:solidFill>
+              <a:srgbClr val="334155"/>
+            </a:solidFill>
+          </a:ln>
+        </p:spPr>
+        <p:style>
+          <a:lnRef idx="1">
+            <a:schemeClr val="accent1"/>
+          </a:lnRef>
+          <a:fillRef idx="3">
+            <a:schemeClr val="accent1"/>
+          </a:fillRef>
+          <a:effectRef idx="2">
+            <a:schemeClr val="accent1"/>
+          </a:effectRef>
+          <a:fontRef idx="minor">
+            <a:schemeClr val="lt1"/>
+          </a:fontRef>
+        </p:style>
+        <p:txBody>
+          <a:bodyPr rtlCol="0" anchor="ctr"/>
+          <a:lstStyle/>
+          <a:p>
             <a:pPr algn="ctr"/>
-            <a:r>
-              <a:rPr sz="1300">
+          </a:p>
+        </p:txBody>
+      </p:sp>
+      <p:sp>
+        <p:nvSpPr>
+          <p:cNvPr id="9" name="TextBox 8"/>
+          <p:cNvSpPr txBox="1"/>
+          <p:nvPr/>
+        </p:nvSpPr>
+        <p:spPr>
+          <a:xfrm>
+            <a:off x="1033272" y="3081528"/>
+            <a:ext cx="5157216" cy="274320"/>
+          </a:xfrm>
+          <a:prstGeom prst="rect">
+            <a:avLst/>
+          </a:prstGeom>
+          <a:noFill/>
+        </p:spPr>
+        <p:txBody>
+          <a:bodyPr wrap="none">
+            <a:spAutoFit/>
+          </a:bodyPr>
+          <a:lstStyle/>
+          <a:p>
+            <a:r>
+              <a:rPr sz="1500" b="1">
+                <a:solidFill>
+                  <a:srgbClr val="FDBA74"/>
+                </a:solidFill>
+                <a:latin typeface="Arial"/>
+              </a:rPr>
+              <a:t>Presentation roadmap</a:t>
+            </a:r>
+          </a:p>
+        </p:txBody>
+      </p:sp>
+      <p:sp>
+        <p:nvSpPr>
+          <p:cNvPr id="10" name="TextBox 9"/>
+          <p:cNvSpPr txBox="1"/>
+          <p:nvPr/>
+        </p:nvSpPr>
+        <p:spPr>
+          <a:xfrm>
+            <a:off x="1078992" y="3383280"/>
+            <a:ext cx="5074920" cy="1508760"/>
+          </a:xfrm>
+          <a:prstGeom prst="rect">
+            <a:avLst/>
+          </a:prstGeom>
+          <a:noFill/>
+        </p:spPr>
+        <p:txBody>
+          <a:bodyPr wrap="square">
+            <a:noAutofit/>
+          </a:bodyPr>
+          <a:lstStyle/>
+          <a:p>
+            <a:pPr>
+              <a:spcAft>
+                <a:spcPts val="600"/>
+              </a:spcAft>
+            </a:pPr>
+            <a:r>
+              <a:rPr sz="1600">
+                <a:solidFill>
+                  <a:srgbClr val="E5E7EB"/>
+                </a:solidFill>
+                <a:latin typeface="Arial"/>
+              </a:rPr>
+              <a:t>Challenge and supply-chain connection</a:t>
+            </a:r>
+          </a:p>
+          <a:p>
+            <a:pPr>
+              <a:spcAft>
+                <a:spcPts val="600"/>
+              </a:spcAft>
+            </a:pPr>
+            <a:r>
+              <a:rPr sz="1600">
+                <a:solidFill>
+                  <a:srgbClr val="E5E7EB"/>
+                </a:solidFill>
+                <a:latin typeface="Arial"/>
+              </a:rPr>
+              <a:t>Science, engineering, and a simple neutralization calculation</a:t>
+            </a:r>
+          </a:p>
+          <a:p>
+            <a:pPr>
+              <a:spcAft>
+                <a:spcPts val="600"/>
+              </a:spcAft>
+            </a:pPr>
+            <a:r>
+              <a:rPr sz="1600">
+                <a:solidFill>
+                  <a:srgbClr val="E5E7EB"/>
+                </a:solidFill>
+                <a:latin typeface="Arial"/>
+              </a:rPr>
+              <a:t>Iron Mountain Mine case study</a:t>
+            </a:r>
+          </a:p>
+          <a:p>
+            <a:pPr>
+              <a:spcAft>
+                <a:spcPts val="600"/>
+              </a:spcAft>
+            </a:pPr>
+            <a:r>
+              <a:rPr sz="1600">
+                <a:solidFill>
+                  <a:srgbClr val="E5E7EB"/>
+                </a:solidFill>
+                <a:latin typeface="Arial"/>
+              </a:rPr>
+              <a:t>Solutions, economics, and regulation</a:t>
+            </a:r>
+          </a:p>
+        </p:txBody>
+      </p:sp>
+      <p:sp>
+        <p:nvSpPr>
+          <p:cNvPr id="11" name="Rounded Rectangle 10"/>
+          <p:cNvSpPr/>
+          <p:nvPr/>
+        </p:nvSpPr>
+        <p:spPr>
+          <a:xfrm>
+            <a:off x="6629400" y="3429000"/>
+            <a:ext cx="4160520" cy="1691640"/>
+          </a:xfrm>
+          <a:prstGeom prst="roundRect">
+            <a:avLst>
+              <a:gd name="adj" fmla="val 8000"/>
+            </a:avLst>
+          </a:prstGeom>
+          <a:solidFill>
+            <a:srgbClr val="111827"/>
+          </a:solidFill>
+          <a:ln w="12700">
+            <a:solidFill>
+              <a:srgbClr val="334155"/>
+            </a:solidFill>
+          </a:ln>
+        </p:spPr>
+        <p:style>
+          <a:lnRef idx="1">
+            <a:schemeClr val="accent1"/>
+          </a:lnRef>
+          <a:fillRef idx="3">
+            <a:schemeClr val="accent1"/>
+          </a:fillRef>
+          <a:effectRef idx="2">
+            <a:schemeClr val="accent1"/>
+          </a:effectRef>
+          <a:fontRef idx="minor">
+            <a:schemeClr val="lt1"/>
+          </a:fontRef>
+        </p:style>
+        <p:txBody>
+          <a:bodyPr rtlCol="0" anchor="ctr"/>
+          <a:lstStyle/>
+          <a:p>
+            <a:pPr algn="ctr"/>
+          </a:p>
+        </p:txBody>
+      </p:sp>
+      <p:sp>
+        <p:nvSpPr>
+          <p:cNvPr id="12" name="TextBox 11"/>
+          <p:cNvSpPr txBox="1"/>
+          <p:nvPr/>
+        </p:nvSpPr>
+        <p:spPr>
+          <a:xfrm>
+            <a:off x="6793992" y="3538728"/>
+            <a:ext cx="3831336" cy="274320"/>
+          </a:xfrm>
+          <a:prstGeom prst="rect">
+            <a:avLst/>
+          </a:prstGeom>
+          <a:noFill/>
+        </p:spPr>
+        <p:txBody>
+          <a:bodyPr wrap="none">
+            <a:spAutoFit/>
+          </a:bodyPr>
+          <a:lstStyle/>
+          <a:p>
+            <a:r>
+              <a:rPr sz="1500" b="1">
+                <a:solidFill>
+                  <a:srgbClr val="FDBA74"/>
+                </a:solidFill>
+                <a:latin typeface="Arial"/>
+              </a:rPr>
+              <a:t>Key message</a:t>
+            </a:r>
+          </a:p>
+        </p:txBody>
+      </p:sp>
+      <p:sp>
+        <p:nvSpPr>
+          <p:cNvPr id="13" name="TextBox 12"/>
+          <p:cNvSpPr txBox="1"/>
+          <p:nvPr/>
+        </p:nvSpPr>
+        <p:spPr>
+          <a:xfrm>
+            <a:off x="6858000" y="3840480"/>
+            <a:ext cx="3703320" cy="1005840"/>
+          </a:xfrm>
+          <a:prstGeom prst="rect">
+            <a:avLst/>
+          </a:prstGeom>
+          <a:noFill/>
+        </p:spPr>
+        <p:txBody>
+          <a:bodyPr wrap="square">
+            <a:spAutoFit/>
+          </a:bodyPr>
+          <a:lstStyle/>
+          <a:p>
+            <a:pPr algn="l"/>
+            <a:r>
+              <a:rPr sz="1600" b="1">
                 <a:solidFill>
                   <a:srgbClr val="FFFFFF"/>
                 </a:solidFill>
-                <a:latin typeface="Courier New"/>
-              </a:rPr>
-              <a:t>2FeS2 + 7O2 + 2H2O -&gt; 2Fe2+ + 4SO4^2- + 4H+</a:t>
-            </a:r>
-          </a:p>
-        </p:txBody>
-      </p:sp>
-      <p:sp>
-        <p:nvSpPr>
-          <p:cNvPr id="9" name="TextBox 8"/>
+                <a:latin typeface="Arial"/>
+              </a:rPr>
+              <a:t>AMD is not just dirty water at one mine site. It is a built-in supply-chain risk that can require decades of treatment.</a:t>
+            </a:r>
+          </a:p>
+        </p:txBody>
+      </p:sp>
+      <p:sp>
+        <p:nvSpPr>
+          <p:cNvPr id="14" name="TextBox 13"/>
           <p:cNvSpPr txBox="1"/>
           <p:nvPr/>
         </p:nvSpPr>
@@ -3469,7 +3705,7 @@
                 </a:solidFill>
                 <a:latin typeface="Arial"/>
               </a:rPr>
-              <a:t>AMD draft deck | Slide 1</a:t>
+              <a:t>Group 7 | AMD presentation | Slide 1</a:t>
             </a:r>
           </a:p>
         </p:txBody>
@@ -3509,7 +3745,7 @@
         <p:spPr>
           <a:xfrm>
             <a:off x="548640" y="320040"/>
-            <a:ext cx="3657600" cy="274320"/>
+            <a:ext cx="4754880" cy="274320"/>
           </a:xfrm>
           <a:prstGeom prst="rect">
             <a:avLst/>
@@ -3529,7 +3765,7 @@
                 </a:solidFill>
                 <a:latin typeface="Arial"/>
               </a:rPr>
-              <a:t>OUTLOOK</a:t>
+              <a:t>TAKEAWAY</a:t>
             </a:r>
           </a:p>
         </p:txBody>
@@ -3543,7 +3779,7 @@
         <p:spPr>
           <a:xfrm>
             <a:off x="548640" y="594360"/>
-            <a:ext cx="10607040" cy="640080"/>
+            <a:ext cx="10789920" cy="685800"/>
           </a:xfrm>
           <a:prstGeom prst="rect">
             <a:avLst/>
@@ -3563,7 +3799,7 @@
                 </a:solidFill>
                 <a:latin typeface="Arial"/>
               </a:rPr>
-              <a:t>Appalachia: restoration plus critical-minerals recovery</a:t>
+              <a:t>Conclusion</a:t>
             </a:r>
           </a:p>
         </p:txBody>
@@ -3577,7 +3813,7 @@
         <p:spPr>
           <a:xfrm>
             <a:off x="548640" y="1298448"/>
-            <a:ext cx="2011680" cy="73152"/>
+            <a:ext cx="2377440" cy="73152"/>
           </a:xfrm>
           <a:prstGeom prst="rect">
             <a:avLst/>
@@ -3619,8 +3855,8 @@
         </p:nvSpPr>
         <p:spPr>
           <a:xfrm>
-            <a:off x="685800" y="1691640"/>
-            <a:ext cx="2971800" cy="4526280"/>
+            <a:off x="749808" y="1700784"/>
+            <a:ext cx="10698480" cy="2057400"/>
           </a:xfrm>
           <a:prstGeom prst="roundRect">
             <a:avLst>
@@ -3666,8 +3902,8 @@
         </p:nvSpPr>
         <p:spPr>
           <a:xfrm>
-            <a:off x="850392" y="1801368"/>
-            <a:ext cx="2642616" cy="274320"/>
+            <a:off x="914400" y="1810512"/>
+            <a:ext cx="10369296" cy="274320"/>
           </a:xfrm>
           <a:prstGeom prst="rect">
             <a:avLst/>
@@ -3687,7 +3923,7 @@
                 </a:solidFill>
                 <a:latin typeface="Arial"/>
               </a:rPr>
-              <a:t>Restoration</a:t>
+              <a:t>Main takeaway</a:t>
             </a:r>
           </a:p>
         </p:txBody>
@@ -3700,8 +3936,8 @@
         </p:nvSpPr>
         <p:spPr>
           <a:xfrm>
-            <a:off x="850392" y="2130552"/>
-            <a:ext cx="2642616" cy="3886200"/>
+            <a:off x="1024128" y="2176272"/>
+            <a:ext cx="10149840" cy="1143000"/>
           </a:xfrm>
           <a:prstGeom prst="rect">
             <a:avLst/>
@@ -3710,39 +3946,19 @@
         </p:spPr>
         <p:txBody>
           <a:bodyPr wrap="square">
-            <a:noAutofit/>
-          </a:bodyPr>
-          <a:lstStyle/>
-          <a:p>
-            <a:pPr>
-              <a:spcAft>
-                <a:spcPts val="600"/>
-              </a:spcAft>
-            </a:pPr>
-            <a:r>
-              <a:rPr sz="1500">
-                <a:solidFill>
-                  <a:srgbClr val="E5E7EB"/>
-                </a:solidFill>
-                <a:latin typeface="Arial"/>
-              </a:rPr>
-              <a:t>Decades of Pennsylvania treatment-system data show AMD cleanup can protect streams cost-effectively.</a:t>
-            </a:r>
-          </a:p>
-          <a:p>
-            <a:pPr>
-              <a:spcAft>
-                <a:spcPts val="600"/>
-              </a:spcAft>
-            </a:pPr>
-            <a:r>
-              <a:rPr sz="1500">
-                <a:solidFill>
-                  <a:srgbClr val="E5E7EB"/>
-                </a:solidFill>
-                <a:latin typeface="Arial"/>
-              </a:rPr>
-              <a:t>This makes AMD infrastructure a regional water-restoration tool.</a:t>
+            <a:spAutoFit/>
+          </a:bodyPr>
+          <a:lstStyle/>
+          <a:p>
+            <a:pPr algn="ctr"/>
+            <a:r>
+              <a:rPr sz="2200" b="1">
+                <a:solidFill>
+                  <a:srgbClr val="FFFFFF"/>
+                </a:solidFill>
+                <a:latin typeface="Arial"/>
+              </a:rPr>
+              <a:t>Acid mine drainage shows that environmental harm in energy and industrial systems begins upstream, when mining exposes sulfide-bearing rock and creates a geochemical system that can persist for decades.</a:t>
             </a:r>
           </a:p>
         </p:txBody>
@@ -3755,8 +3971,8 @@
         </p:nvSpPr>
         <p:spPr>
           <a:xfrm>
-            <a:off x="4023360" y="1691640"/>
-            <a:ext cx="2971800" cy="4526280"/>
+            <a:off x="749808" y="4069080"/>
+            <a:ext cx="5120640" cy="1828800"/>
           </a:xfrm>
           <a:prstGeom prst="roundRect">
             <a:avLst>
@@ -3802,8 +4018,8 @@
         </p:nvSpPr>
         <p:spPr>
           <a:xfrm>
-            <a:off x="4187952" y="1801368"/>
-            <a:ext cx="2642616" cy="274320"/>
+            <a:off x="914400" y="4178808"/>
+            <a:ext cx="4791456" cy="274320"/>
           </a:xfrm>
           <a:prstGeom prst="rect">
             <a:avLst/>
@@ -3823,7 +4039,7 @@
                 </a:solidFill>
                 <a:latin typeface="Arial"/>
               </a:rPr>
-              <a:t>Just transition</a:t>
+              <a:t>What to emphasize when presenting</a:t>
             </a:r>
           </a:p>
         </p:txBody>
@@ -3836,8 +4052,8 @@
         </p:nvSpPr>
         <p:spPr>
           <a:xfrm>
-            <a:off x="4187952" y="2130552"/>
-            <a:ext cx="2642616" cy="3886200"/>
+            <a:off x="987552" y="4498848"/>
+            <a:ext cx="4663440" cy="1188720"/>
           </a:xfrm>
           <a:prstGeom prst="rect">
             <a:avLst/>
@@ -3862,7 +4078,7 @@
                 </a:solidFill>
                 <a:latin typeface="Arial"/>
               </a:rPr>
-              <a:t>AMD burdens often overlap with communities affected by coal decline and economic transition.</a:t>
+              <a:t>AMD is both a chemistry problem and a long-term engineering management problem.</a:t>
             </a:r>
           </a:p>
           <a:p>
@@ -3878,7 +4094,7 @@
                 </a:solidFill>
                 <a:latin typeface="Arial"/>
               </a:rPr>
-              <a:t>Cleanup therefore also supports regional redevelopment and public health.</a:t>
+              <a:t>Iron Mountain proves the cost of waiting until contamination is already severe.</a:t>
             </a:r>
           </a:p>
         </p:txBody>
@@ -3891,8 +4107,8 @@
         </p:nvSpPr>
         <p:spPr>
           <a:xfrm>
-            <a:off x="7360920" y="1691640"/>
-            <a:ext cx="2971800" cy="4526280"/>
+            <a:off x="6199632" y="4069080"/>
+            <a:ext cx="5248656" cy="1828800"/>
           </a:xfrm>
           <a:prstGeom prst="roundRect">
             <a:avLst>
@@ -3938,8 +4154,8 @@
         </p:nvSpPr>
         <p:spPr>
           <a:xfrm>
-            <a:off x="7525512" y="1801368"/>
-            <a:ext cx="2642616" cy="274320"/>
+            <a:off x="6364224" y="4178808"/>
+            <a:ext cx="4919472" cy="274320"/>
           </a:xfrm>
           <a:prstGeom prst="rect">
             <a:avLst/>
@@ -3959,7 +4175,7 @@
                 </a:solidFill>
                 <a:latin typeface="Arial"/>
               </a:rPr>
-              <a:t>Recovery opportunity</a:t>
+              <a:t>Closing statement</a:t>
             </a:r>
           </a:p>
         </p:txBody>
@@ -3972,8 +4188,8 @@
         </p:nvSpPr>
         <p:spPr>
           <a:xfrm>
-            <a:off x="7525512" y="2130552"/>
-            <a:ext cx="2642616" cy="3886200"/>
+            <a:off x="6446520" y="4498848"/>
+            <a:ext cx="4754880" cy="1188720"/>
           </a:xfrm>
           <a:prstGeom prst="rect">
             <a:avLst/>
@@ -3998,7 +4214,7 @@
                 </a:solidFill>
                 <a:latin typeface="Arial"/>
               </a:rPr>
-              <a:t>NETL and partners are developing processes to recover REEs and cobalt from AMD treatment solids.</a:t>
+              <a:t>Sustainable mining has to combine chemistry, hydrology, design, economics, and regulation from the beginning.</a:t>
             </a:r>
           </a:p>
           <a:p>
@@ -4014,7 +4230,7 @@
                 </a:solidFill>
                 <a:latin typeface="Arial"/>
               </a:rPr>
-              <a:t>This could shift some sites from pure cost centers toward remediation plus materials recovery.</a:t>
+              <a:t>The goal is prevention first, then treatment and accountability where needed.</a:t>
             </a:r>
           </a:p>
         </p:txBody>
@@ -4028,7 +4244,42 @@
         <p:spPr>
           <a:xfrm>
             <a:off x="777240" y="5897880"/>
-            <a:ext cx="9144000" cy="228600"/>
+            <a:ext cx="10241280" cy="256032"/>
+          </a:xfrm>
+          <a:prstGeom prst="rect">
+            <a:avLst/>
+          </a:prstGeom>
+          <a:noFill/>
+        </p:spPr>
+        <p:txBody>
+          <a:bodyPr wrap="square">
+            <a:spAutoFit/>
+          </a:bodyPr>
+          <a:lstStyle/>
+          <a:p>
+            <a:pPr algn="l"/>
+            <a:r>
+              <a:rPr sz="1000" b="0">
+                <a:solidFill>
+                  <a:srgbClr val="94A3B8"/>
+                </a:solidFill>
+                <a:latin typeface="Arial"/>
+              </a:rPr>
+              <a:t>Sources: Nordstrom and Alpers (1999); Johnson and Hallberg (2005); U.S. EPA AMD overview.</a:t>
+            </a:r>
+          </a:p>
+        </p:txBody>
+      </p:sp>
+      <p:sp>
+        <p:nvSpPr>
+          <p:cNvPr id="15" name="TextBox 14"/>
+          <p:cNvSpPr txBox="1"/>
+          <p:nvPr/>
+        </p:nvSpPr>
+        <p:spPr>
+          <a:xfrm>
+            <a:off x="548640" y="6355080"/>
+            <a:ext cx="10972800" cy="228600"/>
           </a:xfrm>
           <a:prstGeom prst="rect">
             <a:avLst/>
@@ -4041,6 +4292,7 @@
           </a:bodyPr>
           <a:lstStyle/>
           <a:p>
+            <a:pPr algn="r"/>
             <a:r>
               <a:rPr sz="1000">
                 <a:solidFill>
@@ -4048,42 +4300,7 @@
                 </a:solidFill>
                 <a:latin typeface="Arial"/>
               </a:rPr>
-              <a:t>Sources: Black and Weber (2024); NETL / OSTI rare-earth recovery work.</a:t>
-            </a:r>
-          </a:p>
-        </p:txBody>
-      </p:sp>
-      <p:sp>
-        <p:nvSpPr>
-          <p:cNvPr id="15" name="TextBox 14"/>
-          <p:cNvSpPr txBox="1"/>
-          <p:nvPr/>
-        </p:nvSpPr>
-        <p:spPr>
-          <a:xfrm>
-            <a:off x="548640" y="6355080"/>
-            <a:ext cx="10972800" cy="228600"/>
-          </a:xfrm>
-          <a:prstGeom prst="rect">
-            <a:avLst/>
-          </a:prstGeom>
-          <a:noFill/>
-        </p:spPr>
-        <p:txBody>
-          <a:bodyPr wrap="none">
-            <a:spAutoFit/>
-          </a:bodyPr>
-          <a:lstStyle/>
-          <a:p>
-            <a:pPr algn="r"/>
-            <a:r>
-              <a:rPr sz="1000">
-                <a:solidFill>
-                  <a:srgbClr val="94A3B8"/>
-                </a:solidFill>
-                <a:latin typeface="Arial"/>
-              </a:rPr>
-              <a:t>AMD draft deck | Slide 10</a:t>
+              <a:t>Group 7 | AMD presentation | Slide 10</a:t>
             </a:r>
           </a:p>
         </p:txBody>
@@ -4123,7 +4340,7 @@
         <p:spPr>
           <a:xfrm>
             <a:off x="548640" y="320040"/>
-            <a:ext cx="3657600" cy="274320"/>
+            <a:ext cx="4754880" cy="274320"/>
           </a:xfrm>
           <a:prstGeom prst="rect">
             <a:avLst/>
@@ -4143,7 +4360,7 @@
                 </a:solidFill>
                 <a:latin typeface="Arial"/>
               </a:rPr>
-              <a:t>WRAP-UP</a:t>
+              <a:t>BIBLIOGRAPHY</a:t>
             </a:r>
           </a:p>
         </p:txBody>
@@ -4157,7 +4374,7 @@
         <p:spPr>
           <a:xfrm>
             <a:off x="548640" y="594360"/>
-            <a:ext cx="10607040" cy="640080"/>
+            <a:ext cx="10789920" cy="685800"/>
           </a:xfrm>
           <a:prstGeom prst="rect">
             <a:avLst/>
@@ -4177,7 +4394,7 @@
                 </a:solidFill>
                 <a:latin typeface="Arial"/>
               </a:rPr>
-              <a:t>Takeaways and export note</a:t>
+              <a:t>Selected references</a:t>
             </a:r>
           </a:p>
         </p:txBody>
@@ -4191,7 +4408,7 @@
         <p:spPr>
           <a:xfrm>
             <a:off x="548640" y="1298448"/>
-            <a:ext cx="2011680" cy="73152"/>
+            <a:ext cx="2377440" cy="73152"/>
           </a:xfrm>
           <a:prstGeom prst="rect">
             <a:avLst/>
@@ -4233,8 +4450,8 @@
         </p:nvSpPr>
         <p:spPr>
           <a:xfrm>
-            <a:off x="685800" y="1691640"/>
-            <a:ext cx="5577840" cy="4389120"/>
+            <a:off x="685800" y="1664208"/>
+            <a:ext cx="10972800" cy="4526280"/>
           </a:xfrm>
           <a:prstGeom prst="roundRect">
             <a:avLst>
@@ -4280,42 +4497,8 @@
         </p:nvSpPr>
         <p:spPr>
           <a:xfrm>
-            <a:off x="850392" y="1801368"/>
-            <a:ext cx="5248656" cy="274320"/>
-          </a:xfrm>
-          <a:prstGeom prst="rect">
-            <a:avLst/>
-          </a:prstGeom>
-          <a:noFill/>
-        </p:spPr>
-        <p:txBody>
-          <a:bodyPr wrap="none">
-            <a:spAutoFit/>
-          </a:bodyPr>
-          <a:lstStyle/>
-          <a:p>
-            <a:r>
-              <a:rPr sz="1500" b="1">
-                <a:solidFill>
-                  <a:srgbClr val="FDBA74"/>
-                </a:solidFill>
-                <a:latin typeface="Arial"/>
-              </a:rPr>
-              <a:t>Main takeaways</a:t>
-            </a:r>
-          </a:p>
-        </p:txBody>
-      </p:sp>
-      <p:sp>
-        <p:nvSpPr>
-          <p:cNvPr id="7" name="TextBox 6"/>
-          <p:cNvSpPr txBox="1"/>
-          <p:nvPr/>
-        </p:nvSpPr>
-        <p:spPr>
-          <a:xfrm>
-            <a:off x="914400" y="2103120"/>
-            <a:ext cx="5120640" cy="3657600"/>
+            <a:off x="914400" y="1965960"/>
+            <a:ext cx="10515600" cy="3886200"/>
           </a:xfrm>
           <a:prstGeom prst="rect">
             <a:avLst/>
@@ -4334,13 +4517,13 @@
               </a:spcAft>
             </a:pPr>
             <a:r>
-              <a:rPr sz="1600">
+              <a:rPr sz="1500">
                 <a:solidFill>
                   <a:srgbClr val="E5E7EB"/>
                 </a:solidFill>
                 <a:latin typeface="Arial"/>
               </a:rPr>
-              <a:t>AMD is a predictable geochemical risk that should be addressed early in mine design and closure planning.</a:t>
+              <a:t>Black, Katie Jo, and Jeremy G. Weber. Communications Earth &amp; Environment, 2024.</a:t>
             </a:r>
           </a:p>
           <a:p>
@@ -4350,13 +4533,13 @@
               </a:spcAft>
             </a:pPr>
             <a:r>
-              <a:rPr sz="1600">
+              <a:rPr sz="1500">
                 <a:solidFill>
                   <a:srgbClr val="E5E7EB"/>
                 </a:solidFill>
                 <a:latin typeface="Arial"/>
               </a:rPr>
-              <a:t>Source control is usually more durable than relying only on downstream treatment.</a:t>
+              <a:t>California State Water Resources Control Board. Iron Mountain Mines review petition, 1982.</a:t>
             </a:r>
           </a:p>
           <a:p>
@@ -4366,13 +4549,13 @@
               </a:spcAft>
             </a:pPr>
             <a:r>
-              <a:rPr sz="1600">
+              <a:rPr sz="1500">
                 <a:solidFill>
                   <a:srgbClr val="E5E7EB"/>
                 </a:solidFill>
                 <a:latin typeface="Arial"/>
               </a:rPr>
-              <a:t>For energy and mining supply chains, AMD affects permitting, cost, financing, community acceptance, and ESG risk.</a:t>
+              <a:t>Johnson, D. Barrie, and Kevin B. Hallberg. Science of the Total Environment, 2005.</a:t>
             </a:r>
           </a:p>
           <a:p>
@@ -4382,119 +4565,15 @@
               </a:spcAft>
             </a:pPr>
             <a:r>
-              <a:rPr sz="1600">
+              <a:rPr sz="1500">
                 <a:solidFill>
                   <a:srgbClr val="E5E7EB"/>
                 </a:solidFill>
                 <a:latin typeface="Arial"/>
               </a:rPr>
-              <a:t>Recovery of rare earths and other critical minerals from AMD solids is promising but still highly site-specific.</a:t>
-            </a:r>
-          </a:p>
-        </p:txBody>
-      </p:sp>
-      <p:sp>
-        <p:nvSpPr>
-          <p:cNvPr id="8" name="Rounded Rectangle 7"/>
-          <p:cNvSpPr/>
-          <p:nvPr/>
-        </p:nvSpPr>
-        <p:spPr>
-          <a:xfrm>
-            <a:off x="6537960" y="1691640"/>
-            <a:ext cx="4434840" cy="1920240"/>
-          </a:xfrm>
-          <a:prstGeom prst="roundRect">
-            <a:avLst>
-              <a:gd name="adj" fmla="val 8000"/>
-            </a:avLst>
-          </a:prstGeom>
-          <a:solidFill>
-            <a:srgbClr val="111827"/>
-          </a:solidFill>
-          <a:ln w="12700">
-            <a:solidFill>
-              <a:srgbClr val="334155"/>
-            </a:solidFill>
-          </a:ln>
-        </p:spPr>
-        <p:style>
-          <a:lnRef idx="1">
-            <a:schemeClr val="accent1"/>
-          </a:lnRef>
-          <a:fillRef idx="3">
-            <a:schemeClr val="accent1"/>
-          </a:fillRef>
-          <a:effectRef idx="2">
-            <a:schemeClr val="accent1"/>
-          </a:effectRef>
-          <a:fontRef idx="minor">
-            <a:schemeClr val="lt1"/>
-          </a:fontRef>
-        </p:style>
-        <p:txBody>
-          <a:bodyPr rtlCol="0" anchor="ctr"/>
-          <a:lstStyle/>
-          <a:p>
-            <a:pPr algn="ctr"/>
-          </a:p>
-        </p:txBody>
-      </p:sp>
-      <p:sp>
-        <p:nvSpPr>
-          <p:cNvPr id="9" name="TextBox 8"/>
-          <p:cNvSpPr txBox="1"/>
-          <p:nvPr/>
-        </p:nvSpPr>
-        <p:spPr>
-          <a:xfrm>
-            <a:off x="6702552" y="1801368"/>
-            <a:ext cx="4105656" cy="274320"/>
-          </a:xfrm>
-          <a:prstGeom prst="rect">
-            <a:avLst/>
-          </a:prstGeom>
-          <a:noFill/>
-        </p:spPr>
-        <p:txBody>
-          <a:bodyPr wrap="none">
-            <a:spAutoFit/>
-          </a:bodyPr>
-          <a:lstStyle/>
-          <a:p>
-            <a:r>
-              <a:rPr sz="1500" b="1">
-                <a:solidFill>
-                  <a:srgbClr val="FDBA74"/>
-                </a:solidFill>
-                <a:latin typeface="Arial"/>
-              </a:rPr>
-              <a:t>Google Slides import</a:t>
-            </a:r>
-          </a:p>
-        </p:txBody>
-      </p:sp>
-      <p:sp>
-        <p:nvSpPr>
-          <p:cNvPr id="10" name="TextBox 9"/>
-          <p:cNvSpPr txBox="1"/>
-          <p:nvPr/>
-        </p:nvSpPr>
-        <p:spPr>
-          <a:xfrm>
-            <a:off x="6766560" y="2103120"/>
-            <a:ext cx="3977639" cy="1325880"/>
-          </a:xfrm>
-          <a:prstGeom prst="rect">
-            <a:avLst/>
-          </a:prstGeom>
-          <a:noFill/>
-        </p:spPr>
-        <p:txBody>
-          <a:bodyPr wrap="square">
-            <a:noAutofit/>
-          </a:bodyPr>
-          <a:lstStyle/>
+              <a:t>Nordstrom, D. Kirk, and Charles N. Alpers. PNAS, 1999.</a:t>
+            </a:r>
+          </a:p>
           <a:p>
             <a:pPr>
               <a:spcAft>
@@ -4508,7 +4587,7 @@
                 </a:solidFill>
                 <a:latin typeface="Arial"/>
               </a:rPr>
-              <a:t>Open Google Slides.</a:t>
+              <a:t>Rambabu, K. et al. Environmental Science and Ecotechnology, 2020.</a:t>
             </a:r>
           </a:p>
           <a:p>
@@ -4524,7 +4603,7 @@
                 </a:solidFill>
                 <a:latin typeface="Arial"/>
               </a:rPr>
-              <a:t>File -&gt; Open -&gt; Upload.</a:t>
+              <a:t>Skousen, Jeff et al. Mine Water and the Environment, 2017.</a:t>
             </a:r>
           </a:p>
           <a:p>
@@ -4540,7 +4619,7 @@
                 </a:solidFill>
                 <a:latin typeface="Arial"/>
               </a:rPr>
-              <a:t>Select amd-presentation-draft.pptx.</a:t>
+              <a:t>OSMRE AMD guidance and SMCRA overview.</a:t>
             </a:r>
           </a:p>
           <a:p>
@@ -4556,113 +4635,9 @@
                 </a:solidFill>
                 <a:latin typeface="Arial"/>
               </a:rPr>
-              <a:t>Google Slides will convert it into an editable deck.</a:t>
-            </a:r>
-          </a:p>
-        </p:txBody>
-      </p:sp>
-      <p:sp>
-        <p:nvSpPr>
-          <p:cNvPr id="11" name="Rounded Rectangle 10"/>
-          <p:cNvSpPr/>
-          <p:nvPr/>
-        </p:nvSpPr>
-        <p:spPr>
-          <a:xfrm>
-            <a:off x="6537960" y="3840480"/>
-            <a:ext cx="4434840" cy="2240280"/>
-          </a:xfrm>
-          <a:prstGeom prst="roundRect">
-            <a:avLst>
-              <a:gd name="adj" fmla="val 8000"/>
-            </a:avLst>
-          </a:prstGeom>
-          <a:solidFill>
-            <a:srgbClr val="111827"/>
-          </a:solidFill>
-          <a:ln w="12700">
-            <a:solidFill>
-              <a:srgbClr val="334155"/>
-            </a:solidFill>
-          </a:ln>
-        </p:spPr>
-        <p:style>
-          <a:lnRef idx="1">
-            <a:schemeClr val="accent1"/>
-          </a:lnRef>
-          <a:fillRef idx="3">
-            <a:schemeClr val="accent1"/>
-          </a:fillRef>
-          <a:effectRef idx="2">
-            <a:schemeClr val="accent1"/>
-          </a:effectRef>
-          <a:fontRef idx="minor">
-            <a:schemeClr val="lt1"/>
-          </a:fontRef>
-        </p:style>
-        <p:txBody>
-          <a:bodyPr rtlCol="0" anchor="ctr"/>
-          <a:lstStyle/>
-          <a:p>
-            <a:pPr algn="ctr"/>
-          </a:p>
-        </p:txBody>
-      </p:sp>
-      <p:sp>
-        <p:nvSpPr>
-          <p:cNvPr id="12" name="TextBox 11"/>
-          <p:cNvSpPr txBox="1"/>
-          <p:nvPr/>
-        </p:nvSpPr>
-        <p:spPr>
-          <a:xfrm>
-            <a:off x="6702552" y="3950208"/>
-            <a:ext cx="4105656" cy="274320"/>
-          </a:xfrm>
-          <a:prstGeom prst="rect">
-            <a:avLst/>
-          </a:prstGeom>
-          <a:noFill/>
-        </p:spPr>
-        <p:txBody>
-          <a:bodyPr wrap="none">
-            <a:spAutoFit/>
-          </a:bodyPr>
-          <a:lstStyle/>
-          <a:p>
-            <a:r>
-              <a:rPr sz="1500" b="1">
-                <a:solidFill>
-                  <a:srgbClr val="FDBA74"/>
-                </a:solidFill>
-                <a:latin typeface="Arial"/>
-              </a:rPr>
-              <a:t>Selected references</a:t>
-            </a:r>
-          </a:p>
-        </p:txBody>
-      </p:sp>
-      <p:sp>
-        <p:nvSpPr>
-          <p:cNvPr id="13" name="TextBox 12"/>
-          <p:cNvSpPr txBox="1"/>
-          <p:nvPr/>
-        </p:nvSpPr>
-        <p:spPr>
-          <a:xfrm>
-            <a:off x="6766560" y="4251960"/>
-            <a:ext cx="3977639" cy="1554480"/>
-          </a:xfrm>
-          <a:prstGeom prst="rect">
-            <a:avLst/>
-          </a:prstGeom>
-          <a:noFill/>
-        </p:spPr>
-        <p:txBody>
-          <a:bodyPr wrap="square">
-            <a:noAutofit/>
-          </a:bodyPr>
-          <a:lstStyle/>
+              <a:t>U.S. EPA AMD, NPDES, and Iron Mountain resources.</a:t>
+            </a:r>
+          </a:p>
           <a:p>
             <a:pPr>
               <a:spcAft>
@@ -4670,13 +4645,13 @@
               </a:spcAft>
             </a:pPr>
             <a:r>
-              <a:rPr sz="1400">
+              <a:rPr sz="1500">
                 <a:solidFill>
                   <a:srgbClr val="E5E7EB"/>
                 </a:solidFill>
                 <a:latin typeface="Arial"/>
               </a:rPr>
-              <a:t>EPA abandoned mine drainage overview</a:t>
+              <a:t>U.S. Geological Survey AMD overview.</a:t>
             </a:r>
           </a:p>
           <a:p>
@@ -4686,68 +4661,55 @@
               </a:spcAft>
             </a:pPr>
             <a:r>
-              <a:rPr sz="1400">
+              <a:rPr sz="1500">
                 <a:solidFill>
                   <a:srgbClr val="E5E7EB"/>
                 </a:solidFill>
                 <a:latin typeface="Arial"/>
               </a:rPr>
-              <a:t>USGS acid mine drainage overview</a:t>
-            </a:r>
-          </a:p>
-          <a:p>
-            <a:pPr>
-              <a:spcAft>
-                <a:spcPts val="600"/>
-              </a:spcAft>
-            </a:pPr>
-            <a:r>
-              <a:rPr sz="1400">
-                <a:solidFill>
-                  <a:srgbClr val="E5E7EB"/>
-                </a:solidFill>
-                <a:latin typeface="Arial"/>
-              </a:rPr>
-              <a:t>EPA MIW treatment guide</a:t>
-            </a:r>
-          </a:p>
-          <a:p>
-            <a:pPr>
-              <a:spcAft>
-                <a:spcPts val="600"/>
-              </a:spcAft>
-            </a:pPr>
-            <a:r>
-              <a:rPr sz="1400">
-                <a:solidFill>
-                  <a:srgbClr val="E5E7EB"/>
-                </a:solidFill>
-                <a:latin typeface="Arial"/>
-              </a:rPr>
-              <a:t>Black and Weber (2024)</a:t>
-            </a:r>
-          </a:p>
-          <a:p>
-            <a:pPr>
-              <a:spcAft>
-                <a:spcPts val="600"/>
-              </a:spcAft>
-            </a:pPr>
-            <a:r>
-              <a:rPr sz="1400">
-                <a:solidFill>
-                  <a:srgbClr val="E5E7EB"/>
-                </a:solidFill>
-                <a:latin typeface="Arial"/>
-              </a:rPr>
-              <a:t>NETL / OSTI REE recovery summaries</a:t>
-            </a:r>
-          </a:p>
-        </p:txBody>
-      </p:sp>
-      <p:sp>
-        <p:nvSpPr>
-          <p:cNvPr id="14" name="TextBox 13"/>
+              <a:t>Zipper, Carl E. et al. Virginia Tech AMD treatment guide, 2023.</a:t>
+            </a:r>
+          </a:p>
+        </p:txBody>
+      </p:sp>
+      <p:sp>
+        <p:nvSpPr>
+          <p:cNvPr id="7" name="TextBox 6"/>
+          <p:cNvSpPr txBox="1"/>
+          <p:nvPr/>
+        </p:nvSpPr>
+        <p:spPr>
+          <a:xfrm>
+            <a:off x="777240" y="5897880"/>
+            <a:ext cx="10241280" cy="256032"/>
+          </a:xfrm>
+          <a:prstGeom prst="rect">
+            <a:avLst/>
+          </a:prstGeom>
+          <a:noFill/>
+        </p:spPr>
+        <p:txBody>
+          <a:bodyPr wrap="square">
+            <a:spAutoFit/>
+          </a:bodyPr>
+          <a:lstStyle/>
+          <a:p>
+            <a:pPr algn="l"/>
+            <a:r>
+              <a:rPr sz="1000" b="0">
+                <a:solidFill>
+                  <a:srgbClr val="94A3B8"/>
+                </a:solidFill>
+                <a:latin typeface="Arial"/>
+              </a:rPr>
+              <a:t>Use the bibliography in your paper for full citation formatting on the submitted assignment.</a:t>
+            </a:r>
+          </a:p>
+        </p:txBody>
+      </p:sp>
+      <p:sp>
+        <p:nvSpPr>
+          <p:cNvPr id="8" name="TextBox 7"/>
           <p:cNvSpPr txBox="1"/>
           <p:nvPr/>
         </p:nvSpPr>
@@ -4775,7 +4737,7 @@
                 </a:solidFill>
                 <a:latin typeface="Arial"/>
               </a:rPr>
-              <a:t>AMD draft deck | Slide 11</a:t>
+              <a:t>Group 7 | AMD presentation | Slide 11</a:t>
             </a:r>
           </a:p>
         </p:txBody>
@@ -4815,7 +4777,7 @@
         <p:spPr>
           <a:xfrm>
             <a:off x="548640" y="320040"/>
-            <a:ext cx="3657600" cy="274320"/>
+            <a:ext cx="4754880" cy="274320"/>
           </a:xfrm>
           <a:prstGeom prst="rect">
             <a:avLst/>
@@ -4835,7 +4797,7 @@
                 </a:solidFill>
                 <a:latin typeface="Arial"/>
               </a:rPr>
-              <a:t>OVERVIEW</a:t>
+              <a:t>CHALLENGE</a:t>
             </a:r>
           </a:p>
         </p:txBody>
@@ -4849,7 +4811,7 @@
         <p:spPr>
           <a:xfrm>
             <a:off x="548640" y="594360"/>
-            <a:ext cx="10607040" cy="640080"/>
+            <a:ext cx="10789920" cy="685800"/>
           </a:xfrm>
           <a:prstGeom prst="rect">
             <a:avLst/>
@@ -4869,7 +4831,7 @@
                 </a:solidFill>
                 <a:latin typeface="Arial"/>
               </a:rPr>
-              <a:t>What acid mine drainage is</a:t>
+              <a:t>What AMD is and why it matters</a:t>
             </a:r>
           </a:p>
         </p:txBody>
@@ -4883,7 +4845,7 @@
         <p:spPr>
           <a:xfrm>
             <a:off x="548640" y="1298448"/>
-            <a:ext cx="2011680" cy="73152"/>
+            <a:ext cx="2377440" cy="73152"/>
           </a:xfrm>
           <a:prstGeom prst="rect">
             <a:avLst/>
@@ -4972,8 +4934,8 @@
         </p:nvSpPr>
         <p:spPr>
           <a:xfrm>
-            <a:off x="822960" y="1828800"/>
-            <a:ext cx="10424160" cy="4023360"/>
+            <a:off x="841248" y="1847088"/>
+            <a:ext cx="10424160" cy="3886200"/>
           </a:xfrm>
           <a:prstGeom prst="rect">
             <a:avLst/>
@@ -4992,13 +4954,13 @@
               </a:spcAft>
             </a:pPr>
             <a:r>
-              <a:rPr sz="2000">
+              <a:rPr sz="1900">
                 <a:solidFill>
                   <a:srgbClr val="E5E7EB"/>
                 </a:solidFill>
                 <a:latin typeface="Arial"/>
               </a:rPr>
-              <a:t>AMD forms when sulfide minerals such as pyrite are exposed to air and water during or after mining.</a:t>
+              <a:t>AMD forms when mining exposes sulfide minerals, especially pyrite, to oxygen and water.</a:t>
             </a:r>
           </a:p>
           <a:p>
@@ -5008,13 +4970,13 @@
               </a:spcAft>
             </a:pPr>
             <a:r>
-              <a:rPr sz="2000">
+              <a:rPr sz="1900">
                 <a:solidFill>
                   <a:srgbClr val="E5E7EB"/>
                 </a:solidFill>
                 <a:latin typeface="Arial"/>
               </a:rPr>
-              <a:t>Oxidation generates sulfuric acid and mobilizes dissolved metals such as iron, aluminum, and manganese.</a:t>
+              <a:t>That reaction generates sulfuric acid and dissolves metals into water, creating low-pH, sulfate-rich discharge.</a:t>
             </a:r>
           </a:p>
           <a:p>
@@ -5024,13 +4986,13 @@
               </a:spcAft>
             </a:pPr>
             <a:r>
-              <a:rPr sz="2000">
+              <a:rPr sz="1900">
                 <a:solidFill>
                   <a:srgbClr val="E5E7EB"/>
                 </a:solidFill>
                 <a:latin typeface="Arial"/>
               </a:rPr>
-              <a:t>Microbial activity can accelerate these reactions and make the drainage persist for decades or longer.</a:t>
+              <a:t>The harm is not limited to one day of extraction: waste rock, tailings, and abandoned tunnels can keep reacting for years or decades.</a:t>
             </a:r>
           </a:p>
           <a:p>
@@ -5040,13 +5002,13 @@
               </a:spcAft>
             </a:pPr>
             <a:r>
-              <a:rPr sz="2000">
+              <a:rPr sz="1900">
                 <a:solidFill>
                   <a:srgbClr val="E5E7EB"/>
                 </a:solidFill>
                 <a:latin typeface="Arial"/>
               </a:rPr>
-              <a:t>AMD can occur at both active and abandoned coal and metal mines.</a:t>
+              <a:t>So AMD is not just a local water-pollution problem - it is a supply-chain problem built into mining itself.</a:t>
             </a:r>
           </a:p>
         </p:txBody>
@@ -5060,7 +5022,42 @@
         <p:spPr>
           <a:xfrm>
             <a:off x="777240" y="5897880"/>
-            <a:ext cx="7315200" cy="228600"/>
+            <a:ext cx="10241280" cy="256032"/>
+          </a:xfrm>
+          <a:prstGeom prst="rect">
+            <a:avLst/>
+          </a:prstGeom>
+          <a:noFill/>
+        </p:spPr>
+        <p:txBody>
+          <a:bodyPr wrap="square">
+            <a:spAutoFit/>
+          </a:bodyPr>
+          <a:lstStyle/>
+          <a:p>
+            <a:pPr algn="l"/>
+            <a:r>
+              <a:rPr sz="1000" b="0">
+                <a:solidFill>
+                  <a:srgbClr val="94A3B8"/>
+                </a:solidFill>
+                <a:latin typeface="Arial"/>
+              </a:rPr>
+              <a:t>Sources: Johnson and Hallberg (2005); U.S. EPA AMD overview; OSMRE AMD resources.</a:t>
+            </a:r>
+          </a:p>
+        </p:txBody>
+      </p:sp>
+      <p:sp>
+        <p:nvSpPr>
+          <p:cNvPr id="8" name="TextBox 7"/>
+          <p:cNvSpPr txBox="1"/>
+          <p:nvPr/>
+        </p:nvSpPr>
+        <p:spPr>
+          <a:xfrm>
+            <a:off x="548640" y="6355080"/>
+            <a:ext cx="10972800" cy="228600"/>
           </a:xfrm>
           <a:prstGeom prst="rect">
             <a:avLst/>
@@ -5073,6 +5070,7 @@
           </a:bodyPr>
           <a:lstStyle/>
           <a:p>
+            <a:pPr algn="r"/>
             <a:r>
               <a:rPr sz="1000">
                 <a:solidFill>
@@ -5080,42 +5078,7 @@
                 </a:solidFill>
                 <a:latin typeface="Arial"/>
               </a:rPr>
-              <a:t>Sources: U.S. EPA abandoned mine drainage overview; USGS acid mine drainage overview.</a:t>
-            </a:r>
-          </a:p>
-        </p:txBody>
-      </p:sp>
-      <p:sp>
-        <p:nvSpPr>
-          <p:cNvPr id="8" name="TextBox 7"/>
-          <p:cNvSpPr txBox="1"/>
-          <p:nvPr/>
-        </p:nvSpPr>
-        <p:spPr>
-          <a:xfrm>
-            <a:off x="548640" y="6355080"/>
-            <a:ext cx="10972800" cy="228600"/>
-          </a:xfrm>
-          <a:prstGeom prst="rect">
-            <a:avLst/>
-          </a:prstGeom>
-          <a:noFill/>
-        </p:spPr>
-        <p:txBody>
-          <a:bodyPr wrap="none">
-            <a:spAutoFit/>
-          </a:bodyPr>
-          <a:lstStyle/>
-          <a:p>
-            <a:pPr algn="r"/>
-            <a:r>
-              <a:rPr sz="1000">
-                <a:solidFill>
-                  <a:srgbClr val="94A3B8"/>
-                </a:solidFill>
-                <a:latin typeface="Arial"/>
-              </a:rPr>
-              <a:t>AMD draft deck | Slide 2</a:t>
+              <a:t>Group 7 | AMD presentation | Slide 2</a:t>
             </a:r>
           </a:p>
         </p:txBody>
@@ -5155,7 +5118,7 @@
         <p:spPr>
           <a:xfrm>
             <a:off x="548640" y="320040"/>
-            <a:ext cx="3657600" cy="274320"/>
+            <a:ext cx="4754880" cy="274320"/>
           </a:xfrm>
           <a:prstGeom prst="rect">
             <a:avLst/>
@@ -5175,7 +5138,7 @@
                 </a:solidFill>
                 <a:latin typeface="Arial"/>
               </a:rPr>
-              <a:t>IMPACT</a:t>
+              <a:t>SUPPLY CHAIN</a:t>
             </a:r>
           </a:p>
         </p:txBody>
@@ -5189,7 +5152,7 @@
         <p:spPr>
           <a:xfrm>
             <a:off x="548640" y="594360"/>
-            <a:ext cx="10607040" cy="640080"/>
+            <a:ext cx="10789920" cy="685800"/>
           </a:xfrm>
           <a:prstGeom prst="rect">
             <a:avLst/>
@@ -5209,7 +5172,7 @@
                 </a:solidFill>
                 <a:latin typeface="Arial"/>
               </a:rPr>
-              <a:t>Why AMD matters</a:t>
+              <a:t>How AMD fits into the energy supply chain</a:t>
             </a:r>
           </a:p>
         </p:txBody>
@@ -5223,7 +5186,7 @@
         <p:spPr>
           <a:xfrm>
             <a:off x="548640" y="1298448"/>
-            <a:ext cx="2011680" cy="73152"/>
+            <a:ext cx="2377440" cy="73152"/>
           </a:xfrm>
           <a:prstGeom prst="rect">
             <a:avLst/>
@@ -5312,8 +5275,8 @@
         </p:nvSpPr>
         <p:spPr>
           <a:xfrm>
-            <a:off x="822960" y="1828800"/>
-            <a:ext cx="10424160" cy="4023360"/>
+            <a:off x="841248" y="1847088"/>
+            <a:ext cx="10424160" cy="3886200"/>
           </a:xfrm>
           <a:prstGeom prst="rect">
             <a:avLst/>
@@ -5332,13 +5295,13 @@
               </a:spcAft>
             </a:pPr>
             <a:r>
-              <a:rPr sz="2000">
+              <a:rPr sz="1900">
                 <a:solidFill>
                   <a:srgbClr val="E5E7EB"/>
                 </a:solidFill>
                 <a:latin typeface="Arial"/>
               </a:rPr>
-              <a:t>Acidic, metal-rich water degrades streams, groundwater, sediments, aquatic habitat, and downstream water uses.</a:t>
+              <a:t>Mining sits near the beginning of the supply chain for coal, metals, wires, and industrial infrastructure.</a:t>
             </a:r>
           </a:p>
           <a:p>
@@ -5348,13 +5311,13 @@
               </a:spcAft>
             </a:pPr>
             <a:r>
-              <a:rPr sz="2000">
+              <a:rPr sz="1900">
                 <a:solidFill>
                   <a:srgbClr val="E5E7EB"/>
                 </a:solidFill>
                 <a:latin typeface="Arial"/>
               </a:rPr>
-              <a:t>EPA guidance notes mining-influenced water affects more than 10,000 miles of receiving waters in the United States.</a:t>
+              <a:t>Blasting, excavation, crushing, ore processing, and waste storage all increase exposure of sulfide-bearing rock.</a:t>
             </a:r>
           </a:p>
           <a:p>
@@ -5364,13 +5327,13 @@
               </a:spcAft>
             </a:pPr>
             <a:r>
-              <a:rPr sz="2000">
+              <a:rPr sz="1900">
                 <a:solidFill>
                   <a:srgbClr val="E5E7EB"/>
                 </a:solidFill>
                 <a:latin typeface="Arial"/>
               </a:rPr>
-              <a:t>Pennsylvania reports roughly 5,600 AMD-impaired stream miles, showing how severe the issue can become in legacy coal regions.</a:t>
+              <a:t>Water then flows through waste piles, tunnels, and tailings, carrying acidity and dissolved metals into nearby watersheds.</a:t>
             </a:r>
           </a:p>
           <a:p>
@@ -5380,13 +5343,13 @@
               </a:spcAft>
             </a:pPr>
             <a:r>
-              <a:rPr sz="2000">
+              <a:rPr sz="1900">
                 <a:solidFill>
                   <a:srgbClr val="E5E7EB"/>
                 </a:solidFill>
                 <a:latin typeface="Arial"/>
               </a:rPr>
-              <a:t>The problem can outlast mine closure and become a public liability if treatment or maintenance stops.</a:t>
+              <a:t>After closure, the challenge shifts from extraction to long-term containment, treatment, and monitoring.</a:t>
             </a:r>
           </a:p>
         </p:txBody>
@@ -5400,7 +5363,42 @@
         <p:spPr>
           <a:xfrm>
             <a:off x="777240" y="5897880"/>
-            <a:ext cx="7315200" cy="228600"/>
+            <a:ext cx="10241280" cy="256032"/>
+          </a:xfrm>
+          <a:prstGeom prst="rect">
+            <a:avLst/>
+          </a:prstGeom>
+          <a:noFill/>
+        </p:spPr>
+        <p:txBody>
+          <a:bodyPr wrap="square">
+            <a:spAutoFit/>
+          </a:bodyPr>
+          <a:lstStyle/>
+          <a:p>
+            <a:pPr algn="l"/>
+            <a:r>
+              <a:rPr sz="1000" b="0">
+                <a:solidFill>
+                  <a:srgbClr val="94A3B8"/>
+                </a:solidFill>
+                <a:latin typeface="Arial"/>
+              </a:rPr>
+              <a:t>Sources: U.S. EPA AMD overview; OSMRE AMD resources; Johnson and Hallberg (2005).</a:t>
+            </a:r>
+          </a:p>
+        </p:txBody>
+      </p:sp>
+      <p:sp>
+        <p:nvSpPr>
+          <p:cNvPr id="8" name="TextBox 7"/>
+          <p:cNvSpPr txBox="1"/>
+          <p:nvPr/>
+        </p:nvSpPr>
+        <p:spPr>
+          <a:xfrm>
+            <a:off x="548640" y="6355080"/>
+            <a:ext cx="10972800" cy="228600"/>
           </a:xfrm>
           <a:prstGeom prst="rect">
             <a:avLst/>
@@ -5413,6 +5411,7 @@
           </a:bodyPr>
           <a:lstStyle/>
           <a:p>
+            <a:pPr algn="r"/>
             <a:r>
               <a:rPr sz="1000">
                 <a:solidFill>
@@ -5420,42 +5419,7 @@
                 </a:solidFill>
                 <a:latin typeface="Arial"/>
               </a:rPr>
-              <a:t>Sources: EPA MIW treatment guide; PA AMD impairment summaries; SRBC regional strategy materials.</a:t>
-            </a:r>
-          </a:p>
-        </p:txBody>
-      </p:sp>
-      <p:sp>
-        <p:nvSpPr>
-          <p:cNvPr id="8" name="TextBox 7"/>
-          <p:cNvSpPr txBox="1"/>
-          <p:nvPr/>
-        </p:nvSpPr>
-        <p:spPr>
-          <a:xfrm>
-            <a:off x="548640" y="6355080"/>
-            <a:ext cx="10972800" cy="228600"/>
-          </a:xfrm>
-          <a:prstGeom prst="rect">
-            <a:avLst/>
-          </a:prstGeom>
-          <a:noFill/>
-        </p:spPr>
-        <p:txBody>
-          <a:bodyPr wrap="none">
-            <a:spAutoFit/>
-          </a:bodyPr>
-          <a:lstStyle/>
-          <a:p>
-            <a:pPr algn="r"/>
-            <a:r>
-              <a:rPr sz="1000">
-                <a:solidFill>
-                  <a:srgbClr val="94A3B8"/>
-                </a:solidFill>
-                <a:latin typeface="Arial"/>
-              </a:rPr>
-              <a:t>AMD draft deck | Slide 3</a:t>
+              <a:t>Group 7 | AMD presentation | Slide 3</a:t>
             </a:r>
           </a:p>
         </p:txBody>
@@ -5495,7 +5459,7 @@
         <p:spPr>
           <a:xfrm>
             <a:off x="548640" y="320040"/>
-            <a:ext cx="3657600" cy="274320"/>
+            <a:ext cx="4754880" cy="274320"/>
           </a:xfrm>
           <a:prstGeom prst="rect">
             <a:avLst/>
@@ -5515,7 +5479,7 @@
                 </a:solidFill>
                 <a:latin typeface="Arial"/>
               </a:rPr>
-              <a:t>SUPPLY CHAIN</a:t>
+              <a:t>CHEMISTRY</a:t>
             </a:r>
           </a:p>
         </p:txBody>
@@ -5529,7 +5493,7 @@
         <p:spPr>
           <a:xfrm>
             <a:off x="548640" y="594360"/>
-            <a:ext cx="10607040" cy="640080"/>
+            <a:ext cx="10789920" cy="685800"/>
           </a:xfrm>
           <a:prstGeom prst="rect">
             <a:avLst/>
@@ -5549,7 +5513,7 @@
                 </a:solidFill>
                 <a:latin typeface="Arial"/>
               </a:rPr>
-              <a:t>Energy supply chain implications</a:t>
+              <a:t>Science and engineering principles</a:t>
             </a:r>
           </a:p>
         </p:txBody>
@@ -5563,7 +5527,7 @@
         <p:spPr>
           <a:xfrm>
             <a:off x="548640" y="1298448"/>
-            <a:ext cx="2011680" cy="73152"/>
+            <a:ext cx="2377440" cy="73152"/>
           </a:xfrm>
           <a:prstGeom prst="rect">
             <a:avLst/>
@@ -5605,8 +5569,8 @@
         </p:nvSpPr>
         <p:spPr>
           <a:xfrm>
-            <a:off x="548640" y="1554480"/>
-            <a:ext cx="11064240" cy="4526280"/>
+            <a:off x="640080" y="1691640"/>
+            <a:ext cx="5532120" cy="4343400"/>
           </a:xfrm>
           <a:prstGeom prst="roundRect">
             <a:avLst>
@@ -5652,8 +5616,42 @@
         </p:nvSpPr>
         <p:spPr>
           <a:xfrm>
-            <a:off x="822960" y="1828800"/>
-            <a:ext cx="10424160" cy="4023360"/>
+            <a:off x="804672" y="1801368"/>
+            <a:ext cx="5202936" cy="274320"/>
+          </a:xfrm>
+          <a:prstGeom prst="rect">
+            <a:avLst/>
+          </a:prstGeom>
+          <a:noFill/>
+        </p:spPr>
+        <p:txBody>
+          <a:bodyPr wrap="none">
+            <a:spAutoFit/>
+          </a:bodyPr>
+          <a:lstStyle/>
+          <a:p>
+            <a:r>
+              <a:rPr sz="1500" b="1">
+                <a:solidFill>
+                  <a:srgbClr val="FDBA74"/>
+                </a:solidFill>
+                <a:latin typeface="Arial"/>
+              </a:rPr>
+              <a:t>How AMD forms</a:t>
+            </a:r>
+          </a:p>
+        </p:txBody>
+      </p:sp>
+      <p:sp>
+        <p:nvSpPr>
+          <p:cNvPr id="7" name="TextBox 6"/>
+          <p:cNvSpPr txBox="1"/>
+          <p:nvPr/>
+        </p:nvSpPr>
+        <p:spPr>
+          <a:xfrm>
+            <a:off x="868680" y="2130552"/>
+            <a:ext cx="5074920" cy="3611880"/>
           </a:xfrm>
           <a:prstGeom prst="rect">
             <a:avLst/>
@@ -5672,13 +5670,13 @@
               </a:spcAft>
             </a:pPr>
             <a:r>
-              <a:rPr sz="2000">
+              <a:rPr sz="1600">
                 <a:solidFill>
                   <a:srgbClr val="E5E7EB"/>
                 </a:solidFill>
                 <a:latin typeface="Arial"/>
               </a:rPr>
-              <a:t>AMD is a mining and energy supply-chain issue because water liabilities affect permitting, capital planning, bonding, and long-term operating costs.</a:t>
+              <a:t>Pyrite reacts with oxygen and water after mining exposes sulfide-bearing rock.</a:t>
             </a:r>
           </a:p>
           <a:p>
@@ -5688,13 +5686,13 @@
               </a:spcAft>
             </a:pPr>
             <a:r>
-              <a:rPr sz="2000">
+              <a:rPr sz="1600">
                 <a:solidFill>
                   <a:srgbClr val="E5E7EB"/>
                 </a:solidFill>
                 <a:latin typeface="Arial"/>
               </a:rPr>
-              <a:t>Treatment itself becomes part of the supply chain through demand for lime, limestone, power, pumps, labor, and sludge handling.</a:t>
+              <a:t>The reaction generates sulfate, dissolved iron, and hydrogen ions, which lower pH.</a:t>
             </a:r>
           </a:p>
           <a:p>
@@ -5704,13 +5702,13 @@
               </a:spcAft>
             </a:pPr>
             <a:r>
-              <a:rPr sz="2000">
+              <a:rPr sz="1600">
                 <a:solidFill>
                   <a:srgbClr val="E5E7EB"/>
                 </a:solidFill>
                 <a:latin typeface="Arial"/>
               </a:rPr>
-              <a:t>NETL reports AMD treatment wastes in Appalachia may contain about 1,102 tons per year of rare earth element potential.</a:t>
+              <a:t>Ferric iron can keep attacking more pyrite, so the process can become self-propagating.</a:t>
             </a:r>
           </a:p>
           <a:p>
@@ -5720,27 +5718,74 @@
               </a:spcAft>
             </a:pPr>
             <a:r>
-              <a:rPr sz="2000">
+              <a:rPr sz="1600">
                 <a:solidFill>
                   <a:srgbClr val="E5E7EB"/>
                 </a:solidFill>
                 <a:latin typeface="Arial"/>
               </a:rPr>
-              <a:t>That makes AMD both a liability and a possible unconventional feedstock for critical minerals used in advanced energy technologies.</a:t>
-            </a:r>
-          </a:p>
-        </p:txBody>
-      </p:sp>
-      <p:sp>
-        <p:nvSpPr>
-          <p:cNvPr id="7" name="TextBox 6"/>
-          <p:cNvSpPr txBox="1"/>
-          <p:nvPr/>
-        </p:nvSpPr>
-        <p:spPr>
-          <a:xfrm>
-            <a:off x="777240" y="5897880"/>
-            <a:ext cx="7315200" cy="228600"/>
+              <a:t>Iron- and sulfur-oxidizing microbes accelerate the chemistry.</a:t>
+            </a:r>
+          </a:p>
+        </p:txBody>
+      </p:sp>
+      <p:sp>
+        <p:nvSpPr>
+          <p:cNvPr id="8" name="Rounded Rectangle 7"/>
+          <p:cNvSpPr/>
+          <p:nvPr/>
+        </p:nvSpPr>
+        <p:spPr>
+          <a:xfrm>
+            <a:off x="6355080" y="1691640"/>
+            <a:ext cx="4800600" cy="1325880"/>
+          </a:xfrm>
+          <a:prstGeom prst="roundRect">
+            <a:avLst>
+              <a:gd name="adj" fmla="val 8000"/>
+            </a:avLst>
+          </a:prstGeom>
+          <a:solidFill>
+            <a:srgbClr val="111827"/>
+          </a:solidFill>
+          <a:ln w="12700">
+            <a:solidFill>
+              <a:srgbClr val="334155"/>
+            </a:solidFill>
+          </a:ln>
+        </p:spPr>
+        <p:style>
+          <a:lnRef idx="1">
+            <a:schemeClr val="accent1"/>
+          </a:lnRef>
+          <a:fillRef idx="3">
+            <a:schemeClr val="accent1"/>
+          </a:fillRef>
+          <a:effectRef idx="2">
+            <a:schemeClr val="accent1"/>
+          </a:effectRef>
+          <a:fontRef idx="minor">
+            <a:schemeClr val="lt1"/>
+          </a:fontRef>
+        </p:style>
+        <p:txBody>
+          <a:bodyPr rtlCol="0" anchor="ctr"/>
+          <a:lstStyle/>
+          <a:p>
+            <a:pPr algn="ctr"/>
+          </a:p>
+        </p:txBody>
+      </p:sp>
+      <p:sp>
+        <p:nvSpPr>
+          <p:cNvPr id="9" name="TextBox 8"/>
+          <p:cNvSpPr txBox="1"/>
+          <p:nvPr/>
+        </p:nvSpPr>
+        <p:spPr>
+          <a:xfrm>
+            <a:off x="6519672" y="1801368"/>
+            <a:ext cx="4471416" cy="274320"/>
           </a:xfrm>
           <a:prstGeom prst="rect">
             <a:avLst/>
@@ -5754,20 +5799,242 @@
           <a:lstStyle/>
           <a:p>
             <a:r>
-              <a:rPr sz="1000">
+              <a:rPr sz="1500" b="1">
+                <a:solidFill>
+                  <a:srgbClr val="FDBA74"/>
+                </a:solidFill>
+                <a:latin typeface="Arial"/>
+              </a:rPr>
+              <a:t>Simplified reaction</a:t>
+            </a:r>
+          </a:p>
+        </p:txBody>
+      </p:sp>
+      <p:sp>
+        <p:nvSpPr>
+          <p:cNvPr id="10" name="TextBox 9"/>
+          <p:cNvSpPr txBox="1"/>
+          <p:nvPr/>
+        </p:nvSpPr>
+        <p:spPr>
+          <a:xfrm>
+            <a:off x="6601968" y="2148840"/>
+            <a:ext cx="4297680" cy="420624"/>
+          </a:xfrm>
+          <a:prstGeom prst="rect">
+            <a:avLst/>
+          </a:prstGeom>
+          <a:noFill/>
+        </p:spPr>
+        <p:txBody>
+          <a:bodyPr wrap="square">
+            <a:spAutoFit/>
+          </a:bodyPr>
+          <a:lstStyle/>
+          <a:p>
+            <a:pPr algn="ctr"/>
+            <a:r>
+              <a:rPr sz="1800" b="1">
+                <a:solidFill>
+                  <a:srgbClr val="FFFFFF"/>
+                </a:solidFill>
+                <a:latin typeface="Arial"/>
+              </a:rPr>
+              <a:t>2FeS2 + 7O2 + 2H2O -&gt; 2Fe2+ + 4SO4^2- + 4H+</a:t>
+            </a:r>
+          </a:p>
+        </p:txBody>
+      </p:sp>
+      <p:sp>
+        <p:nvSpPr>
+          <p:cNvPr id="11" name="Rounded Rectangle 10"/>
+          <p:cNvSpPr/>
+          <p:nvPr/>
+        </p:nvSpPr>
+        <p:spPr>
+          <a:xfrm>
+            <a:off x="6355080" y="3246120"/>
+            <a:ext cx="4800600" cy="2788920"/>
+          </a:xfrm>
+          <a:prstGeom prst="roundRect">
+            <a:avLst>
+              <a:gd name="adj" fmla="val 8000"/>
+            </a:avLst>
+          </a:prstGeom>
+          <a:solidFill>
+            <a:srgbClr val="111827"/>
+          </a:solidFill>
+          <a:ln w="12700">
+            <a:solidFill>
+              <a:srgbClr val="334155"/>
+            </a:solidFill>
+          </a:ln>
+        </p:spPr>
+        <p:style>
+          <a:lnRef idx="1">
+            <a:schemeClr val="accent1"/>
+          </a:lnRef>
+          <a:fillRef idx="3">
+            <a:schemeClr val="accent1"/>
+          </a:fillRef>
+          <a:effectRef idx="2">
+            <a:schemeClr val="accent1"/>
+          </a:effectRef>
+          <a:fontRef idx="minor">
+            <a:schemeClr val="lt1"/>
+          </a:fontRef>
+        </p:style>
+        <p:txBody>
+          <a:bodyPr rtlCol="0" anchor="ctr"/>
+          <a:lstStyle/>
+          <a:p>
+            <a:pPr algn="ctr"/>
+          </a:p>
+        </p:txBody>
+      </p:sp>
+      <p:sp>
+        <p:nvSpPr>
+          <p:cNvPr id="12" name="TextBox 11"/>
+          <p:cNvSpPr txBox="1"/>
+          <p:nvPr/>
+        </p:nvSpPr>
+        <p:spPr>
+          <a:xfrm>
+            <a:off x="6519672" y="3355848"/>
+            <a:ext cx="4471416" cy="274320"/>
+          </a:xfrm>
+          <a:prstGeom prst="rect">
+            <a:avLst/>
+          </a:prstGeom>
+          <a:noFill/>
+        </p:spPr>
+        <p:txBody>
+          <a:bodyPr wrap="none">
+            <a:spAutoFit/>
+          </a:bodyPr>
+          <a:lstStyle/>
+          <a:p>
+            <a:r>
+              <a:rPr sz="1500" b="1">
+                <a:solidFill>
+                  <a:srgbClr val="FDBA74"/>
+                </a:solidFill>
+                <a:latin typeface="Arial"/>
+              </a:rPr>
+              <a:t>Why low pH matters</a:t>
+            </a:r>
+          </a:p>
+        </p:txBody>
+      </p:sp>
+      <p:sp>
+        <p:nvSpPr>
+          <p:cNvPr id="13" name="TextBox 12"/>
+          <p:cNvSpPr txBox="1"/>
+          <p:nvPr/>
+        </p:nvSpPr>
+        <p:spPr>
+          <a:xfrm>
+            <a:off x="6565392" y="3657600"/>
+            <a:ext cx="4343400" cy="2011680"/>
+          </a:xfrm>
+          <a:prstGeom prst="rect">
+            <a:avLst/>
+          </a:prstGeom>
+          <a:noFill/>
+        </p:spPr>
+        <p:txBody>
+          <a:bodyPr wrap="square">
+            <a:noAutofit/>
+          </a:bodyPr>
+          <a:lstStyle/>
+          <a:p>
+            <a:pPr>
+              <a:spcAft>
+                <a:spcPts val="600"/>
+              </a:spcAft>
+            </a:pPr>
+            <a:r>
+              <a:rPr sz="1500">
+                <a:solidFill>
+                  <a:srgbClr val="E5E7EB"/>
+                </a:solidFill>
+                <a:latin typeface="Arial"/>
+              </a:rPr>
+              <a:t>Low pH keeps metals such as Fe, Al, Cu, Zn, Pb, and Mn dissolved.</a:t>
+            </a:r>
+          </a:p>
+          <a:p>
+            <a:pPr>
+              <a:spcAft>
+                <a:spcPts val="600"/>
+              </a:spcAft>
+            </a:pPr>
+            <a:r>
+              <a:rPr sz="1500">
+                <a:solidFill>
+                  <a:srgbClr val="E5E7EB"/>
+                </a:solidFill>
+                <a:latin typeface="Arial"/>
+              </a:rPr>
+              <a:t>When pH rises later, iron hydroxides can precipitate and coat streambeds.</a:t>
+            </a:r>
+          </a:p>
+          <a:p>
+            <a:pPr>
+              <a:spcAft>
+                <a:spcPts val="600"/>
+              </a:spcAft>
+            </a:pPr>
+            <a:r>
+              <a:rPr sz="1500">
+                <a:solidFill>
+                  <a:srgbClr val="E5E7EB"/>
+                </a:solidFill>
+                <a:latin typeface="Arial"/>
+              </a:rPr>
+              <a:t>Those orange deposits, often called yellowboy, damage habitat and stream ecology.</a:t>
+            </a:r>
+          </a:p>
+        </p:txBody>
+      </p:sp>
+      <p:sp>
+        <p:nvSpPr>
+          <p:cNvPr id="14" name="TextBox 13"/>
+          <p:cNvSpPr txBox="1"/>
+          <p:nvPr/>
+        </p:nvSpPr>
+        <p:spPr>
+          <a:xfrm>
+            <a:off x="777240" y="5897880"/>
+            <a:ext cx="10241280" cy="256032"/>
+          </a:xfrm>
+          <a:prstGeom prst="rect">
+            <a:avLst/>
+          </a:prstGeom>
+          <a:noFill/>
+        </p:spPr>
+        <p:txBody>
+          <a:bodyPr wrap="square">
+            <a:spAutoFit/>
+          </a:bodyPr>
+          <a:lstStyle/>
+          <a:p>
+            <a:pPr algn="l"/>
+            <a:r>
+              <a:rPr sz="1000" b="0">
                 <a:solidFill>
                   <a:srgbClr val="94A3B8"/>
                 </a:solidFill>
                 <a:latin typeface="Arial"/>
               </a:rPr>
-              <a:t>Sources: NETL Geological and Environmental Systems page; OSTI REE-from-AMD summaries.</a:t>
-            </a:r>
-          </a:p>
-        </p:txBody>
-      </p:sp>
-      <p:sp>
-        <p:nvSpPr>
-          <p:cNvPr id="8" name="TextBox 7"/>
+              <a:t>Sources: Cox et al. (2003); OSMRE (2000); U.S. Geological Survey AMD overview; Zipper et al. (2023).</a:t>
+            </a:r>
+          </a:p>
+        </p:txBody>
+      </p:sp>
+      <p:sp>
+        <p:nvSpPr>
+          <p:cNvPr id="15" name="TextBox 14"/>
           <p:cNvSpPr txBox="1"/>
           <p:nvPr/>
         </p:nvSpPr>
@@ -5795,7 +6062,7 @@
                 </a:solidFill>
                 <a:latin typeface="Arial"/>
               </a:rPr>
-              <a:t>AMD draft deck | Slide 4</a:t>
+              <a:t>Group 7 | AMD presentation | Slide 4</a:t>
             </a:r>
           </a:p>
         </p:txBody>
@@ -5835,7 +6102,7 @@
         <p:spPr>
           <a:xfrm>
             <a:off x="548640" y="320040"/>
-            <a:ext cx="3657600" cy="274320"/>
+            <a:ext cx="4754880" cy="274320"/>
           </a:xfrm>
           <a:prstGeom prst="rect">
             <a:avLst/>
@@ -5855,7 +6122,7 @@
                 </a:solidFill>
                 <a:latin typeface="Arial"/>
               </a:rPr>
-              <a:t>TECHNOLOGY</a:t>
+              <a:t>CALCULATION</a:t>
             </a:r>
           </a:p>
         </p:txBody>
@@ -5869,7 +6136,7 @@
         <p:spPr>
           <a:xfrm>
             <a:off x="548640" y="594360"/>
-            <a:ext cx="10607040" cy="640080"/>
+            <a:ext cx="10789920" cy="685800"/>
           </a:xfrm>
           <a:prstGeom prst="rect">
             <a:avLst/>
@@ -5889,7 +6156,7 @@
                 </a:solidFill>
                 <a:latin typeface="Arial"/>
               </a:rPr>
-              <a:t>Technology approaches: predict, prevent, treat, and recover</a:t>
+              <a:t>Simple calculation: why treatment burdens get large fast</a:t>
             </a:r>
           </a:p>
         </p:txBody>
@@ -5903,7 +6170,7 @@
         <p:spPr>
           <a:xfrm>
             <a:off x="548640" y="1298448"/>
-            <a:ext cx="2011680" cy="73152"/>
+            <a:ext cx="2377440" cy="73152"/>
           </a:xfrm>
           <a:prstGeom prst="rect">
             <a:avLst/>
@@ -5945,8 +6212,8 @@
         </p:nvSpPr>
         <p:spPr>
           <a:xfrm>
-            <a:off x="548640" y="1645920"/>
-            <a:ext cx="2651760" cy="1828800"/>
+            <a:off x="731520" y="1664208"/>
+            <a:ext cx="2606040" cy="1325880"/>
           </a:xfrm>
           <a:prstGeom prst="roundRect">
             <a:avLst>
@@ -5992,28 +6259,29 @@
         </p:nvSpPr>
         <p:spPr>
           <a:xfrm>
-            <a:off x="713232" y="1755648"/>
-            <a:ext cx="2322576" cy="274320"/>
-          </a:xfrm>
-          <a:prstGeom prst="rect">
-            <a:avLst/>
-          </a:prstGeom>
-          <a:noFill/>
-        </p:spPr>
-        <p:txBody>
-          <a:bodyPr wrap="none">
+            <a:off x="877824" y="1792224"/>
+            <a:ext cx="2313432" cy="411480"/>
+          </a:xfrm>
+          <a:prstGeom prst="rect">
+            <a:avLst/>
+          </a:prstGeom>
+          <a:noFill/>
+        </p:spPr>
+        <p:txBody>
+          <a:bodyPr wrap="square">
             <a:spAutoFit/>
           </a:bodyPr>
           <a:lstStyle/>
           <a:p>
-            <a:r>
-              <a:rPr sz="1500" b="1">
-                <a:solidFill>
-                  <a:srgbClr val="FDBA74"/>
-                </a:solidFill>
-                <a:latin typeface="Arial"/>
-              </a:rPr>
-              <a:t>Prediction</a:t>
+            <a:pPr algn="l"/>
+            <a:r>
+              <a:rPr sz="2400" b="1">
+                <a:solidFill>
+                  <a:srgbClr val="FFFFFF"/>
+                </a:solidFill>
+                <a:latin typeface="Arial"/>
+              </a:rPr>
+              <a:t>4 mol H+</a:t>
             </a:r>
           </a:p>
         </p:txBody>
@@ -6026,8 +6294,8 @@
         </p:nvSpPr>
         <p:spPr>
           <a:xfrm>
-            <a:off x="685800" y="2084832"/>
-            <a:ext cx="2377440" cy="1316736"/>
+            <a:off x="877824" y="2304288"/>
+            <a:ext cx="2313432" cy="576072"/>
           </a:xfrm>
           <a:prstGeom prst="rect">
             <a:avLst/>
@@ -6036,55 +6304,19 @@
         </p:spPr>
         <p:txBody>
           <a:bodyPr wrap="square">
-            <a:noAutofit/>
-          </a:bodyPr>
-          <a:lstStyle/>
-          <a:p>
-            <a:pPr>
-              <a:spcAft>
-                <a:spcPts val="600"/>
-              </a:spcAft>
-            </a:pPr>
-            <a:r>
-              <a:rPr sz="1300">
-                <a:solidFill>
-                  <a:srgbClr val="E5E7EB"/>
-                </a:solidFill>
-                <a:latin typeface="Arial"/>
-              </a:rPr>
-              <a:t>Static/kinetic testing</a:t>
-            </a:r>
-          </a:p>
-          <a:p>
-            <a:pPr>
-              <a:spcAft>
-                <a:spcPts val="600"/>
-              </a:spcAft>
-            </a:pPr>
-            <a:r>
-              <a:rPr sz="1300">
-                <a:solidFill>
-                  <a:srgbClr val="E5E7EB"/>
-                </a:solidFill>
-                <a:latin typeface="Arial"/>
-              </a:rPr>
-              <a:t>Geochemical modeling</a:t>
-            </a:r>
-          </a:p>
-          <a:p>
-            <a:pPr>
-              <a:spcAft>
-                <a:spcPts val="600"/>
-              </a:spcAft>
-            </a:pPr>
-            <a:r>
-              <a:rPr sz="1300">
-                <a:solidFill>
-                  <a:srgbClr val="E5E7EB"/>
-                </a:solidFill>
-                <a:latin typeface="Arial"/>
-              </a:rPr>
-              <a:t>Waste characterization</a:t>
+            <a:spAutoFit/>
+          </a:bodyPr>
+          <a:lstStyle/>
+          <a:p>
+            <a:pPr algn="l"/>
+            <a:r>
+              <a:rPr sz="1200" b="0">
+                <a:solidFill>
+                  <a:srgbClr val="94A3B8"/>
+                </a:solidFill>
+                <a:latin typeface="Arial"/>
+              </a:rPr>
+              <a:t>Approximate acidity produced per mole of pyrite after combining the oxidation sequence.</a:t>
             </a:r>
           </a:p>
         </p:txBody>
@@ -6097,8 +6329,8 @@
         </p:nvSpPr>
         <p:spPr>
           <a:xfrm>
-            <a:off x="3429000" y="1645920"/>
-            <a:ext cx="2651760" cy="1828800"/>
+            <a:off x="3611880" y="1664208"/>
+            <a:ext cx="2606040" cy="1325880"/>
           </a:xfrm>
           <a:prstGeom prst="roundRect">
             <a:avLst>
@@ -6144,28 +6376,29 @@
         </p:nvSpPr>
         <p:spPr>
           <a:xfrm>
-            <a:off x="3593592" y="1755648"/>
-            <a:ext cx="2322576" cy="274320"/>
-          </a:xfrm>
-          <a:prstGeom prst="rect">
-            <a:avLst/>
-          </a:prstGeom>
-          <a:noFill/>
-        </p:spPr>
-        <p:txBody>
-          <a:bodyPr wrap="none">
+            <a:off x="3758184" y="1792224"/>
+            <a:ext cx="2313432" cy="411480"/>
+          </a:xfrm>
+          <a:prstGeom prst="rect">
+            <a:avLst/>
+          </a:prstGeom>
+          <a:noFill/>
+        </p:spPr>
+        <p:txBody>
+          <a:bodyPr wrap="square">
             <a:spAutoFit/>
           </a:bodyPr>
           <a:lstStyle/>
           <a:p>
-            <a:r>
-              <a:rPr sz="1500" b="1">
-                <a:solidFill>
-                  <a:srgbClr val="FDBA74"/>
-                </a:solidFill>
-                <a:latin typeface="Arial"/>
-              </a:rPr>
-              <a:t>Prevention</a:t>
+            <a:pPr algn="l"/>
+            <a:r>
+              <a:rPr sz="2400" b="1">
+                <a:solidFill>
+                  <a:srgbClr val="FFFFFF"/>
+                </a:solidFill>
+                <a:latin typeface="Arial"/>
+              </a:rPr>
+              <a:t>2 mol CaCO3</a:t>
             </a:r>
           </a:p>
         </p:txBody>
@@ -6178,8 +6411,8 @@
         </p:nvSpPr>
         <p:spPr>
           <a:xfrm>
-            <a:off x="3566160" y="2084832"/>
-            <a:ext cx="2377440" cy="1316736"/>
+            <a:off x="3758184" y="2304288"/>
+            <a:ext cx="2313432" cy="576072"/>
           </a:xfrm>
           <a:prstGeom prst="rect">
             <a:avLst/>
@@ -6188,55 +6421,19 @@
         </p:spPr>
         <p:txBody>
           <a:bodyPr wrap="square">
-            <a:noAutofit/>
-          </a:bodyPr>
-          <a:lstStyle/>
-          <a:p>
-            <a:pPr>
-              <a:spcAft>
-                <a:spcPts val="600"/>
-              </a:spcAft>
-            </a:pPr>
-            <a:r>
-              <a:rPr sz="1300">
-                <a:solidFill>
-                  <a:srgbClr val="E5E7EB"/>
-                </a:solidFill>
-                <a:latin typeface="Arial"/>
-              </a:rPr>
-              <a:t>Covers and encapsulation</a:t>
-            </a:r>
-          </a:p>
-          <a:p>
-            <a:pPr>
-              <a:spcAft>
-                <a:spcPts val="600"/>
-              </a:spcAft>
-            </a:pPr>
-            <a:r>
-              <a:rPr sz="1300">
-                <a:solidFill>
-                  <a:srgbClr val="E5E7EB"/>
-                </a:solidFill>
-                <a:latin typeface="Arial"/>
-              </a:rPr>
-              <a:t>Water diversion</a:t>
-            </a:r>
-          </a:p>
-          <a:p>
-            <a:pPr>
-              <a:spcAft>
-                <a:spcPts val="600"/>
-              </a:spcAft>
-            </a:pPr>
-            <a:r>
-              <a:rPr sz="1300">
-                <a:solidFill>
-                  <a:srgbClr val="E5E7EB"/>
-                </a:solidFill>
-                <a:latin typeface="Arial"/>
-              </a:rPr>
-              <a:t>Alkaline blending / backfilling</a:t>
+            <a:spAutoFit/>
+          </a:bodyPr>
+          <a:lstStyle/>
+          <a:p>
+            <a:pPr algn="l"/>
+            <a:r>
+              <a:rPr sz="1200" b="0">
+                <a:solidFill>
+                  <a:srgbClr val="94A3B8"/>
+                </a:solidFill>
+                <a:latin typeface="Arial"/>
+              </a:rPr>
+              <a:t>Neutralization needed for each mole of pyrite because CaCO3 consumes 2 moles of H+.</a:t>
             </a:r>
           </a:p>
         </p:txBody>
@@ -6249,8 +6446,8 @@
         </p:nvSpPr>
         <p:spPr>
           <a:xfrm>
-            <a:off x="6309360" y="1645920"/>
-            <a:ext cx="2651760" cy="1828800"/>
+            <a:off x="6492240" y="1664208"/>
+            <a:ext cx="2606040" cy="1325880"/>
           </a:xfrm>
           <a:prstGeom prst="roundRect">
             <a:avLst>
@@ -6296,28 +6493,29 @@
         </p:nvSpPr>
         <p:spPr>
           <a:xfrm>
-            <a:off x="6473952" y="1755648"/>
-            <a:ext cx="2322576" cy="274320"/>
-          </a:xfrm>
-          <a:prstGeom prst="rect">
-            <a:avLst/>
-          </a:prstGeom>
-          <a:noFill/>
-        </p:spPr>
-        <p:txBody>
-          <a:bodyPr wrap="none">
+            <a:off x="6638544" y="1792224"/>
+            <a:ext cx="2313432" cy="411480"/>
+          </a:xfrm>
+          <a:prstGeom prst="rect">
+            <a:avLst/>
+          </a:prstGeom>
+          <a:noFill/>
+        </p:spPr>
+        <p:txBody>
+          <a:bodyPr wrap="square">
             <a:spAutoFit/>
           </a:bodyPr>
           <a:lstStyle/>
           <a:p>
-            <a:r>
-              <a:rPr sz="1500" b="1">
-                <a:solidFill>
-                  <a:srgbClr val="FDBA74"/>
-                </a:solidFill>
-                <a:latin typeface="Arial"/>
-              </a:rPr>
-              <a:t>Active treatment</a:t>
+            <a:pPr algn="l"/>
+            <a:r>
+              <a:rPr sz="2400" b="1">
+                <a:solidFill>
+                  <a:srgbClr val="FFFFFF"/>
+                </a:solidFill>
+                <a:latin typeface="Arial"/>
+              </a:rPr>
+              <a:t>1.67 kg CaCO3 / kg pyrite</a:t>
             </a:r>
           </a:p>
         </p:txBody>
@@ -6330,8 +6528,8 @@
         </p:nvSpPr>
         <p:spPr>
           <a:xfrm>
-            <a:off x="6446520" y="2084832"/>
-            <a:ext cx="2377440" cy="1316736"/>
+            <a:off x="6638544" y="2304288"/>
+            <a:ext cx="2313432" cy="576072"/>
           </a:xfrm>
           <a:prstGeom prst="rect">
             <a:avLst/>
@@ -6340,55 +6538,19 @@
         </p:spPr>
         <p:txBody>
           <a:bodyPr wrap="square">
-            <a:noAutofit/>
-          </a:bodyPr>
-          <a:lstStyle/>
-          <a:p>
-            <a:pPr>
-              <a:spcAft>
-                <a:spcPts val="600"/>
-              </a:spcAft>
-            </a:pPr>
-            <a:r>
-              <a:rPr sz="1300">
-                <a:solidFill>
-                  <a:srgbClr val="E5E7EB"/>
-                </a:solidFill>
-                <a:latin typeface="Arial"/>
-              </a:rPr>
-              <a:t>Lime or caustic neutralization</a:t>
-            </a:r>
-          </a:p>
-          <a:p>
-            <a:pPr>
-              <a:spcAft>
-                <a:spcPts val="600"/>
-              </a:spcAft>
-            </a:pPr>
-            <a:r>
-              <a:rPr sz="1300">
-                <a:solidFill>
-                  <a:srgbClr val="E5E7EB"/>
-                </a:solidFill>
-                <a:latin typeface="Arial"/>
-              </a:rPr>
-              <a:t>Aeration and sludge handling</a:t>
-            </a:r>
-          </a:p>
-          <a:p>
-            <a:pPr>
-              <a:spcAft>
-                <a:spcPts val="600"/>
-              </a:spcAft>
-            </a:pPr>
-            <a:r>
-              <a:rPr sz="1300">
-                <a:solidFill>
-                  <a:srgbClr val="E5E7EB"/>
-                </a:solidFill>
-                <a:latin typeface="Arial"/>
-              </a:rPr>
-              <a:t>Best for high flow and variable chemistry</a:t>
+            <a:spAutoFit/>
+          </a:bodyPr>
+          <a:lstStyle/>
+          <a:p>
+            <a:pPr algn="l"/>
+            <a:r>
+              <a:rPr sz="1200" b="0">
+                <a:solidFill>
+                  <a:srgbClr val="94A3B8"/>
+                </a:solidFill>
+                <a:latin typeface="Arial"/>
+              </a:rPr>
+              <a:t>Neutralization requirement using about 120 g/mol for pyrite and 100 g/mol for CaCO3.</a:t>
             </a:r>
           </a:p>
         </p:txBody>
@@ -6401,8 +6563,8 @@
         </p:nvSpPr>
         <p:spPr>
           <a:xfrm>
-            <a:off x="9189720" y="1645920"/>
-            <a:ext cx="2423160" cy="1828800"/>
+            <a:off x="9372600" y="1664208"/>
+            <a:ext cx="1874519" cy="1325880"/>
           </a:xfrm>
           <a:prstGeom prst="roundRect">
             <a:avLst>
@@ -6448,28 +6610,29 @@
         </p:nvSpPr>
         <p:spPr>
           <a:xfrm>
-            <a:off x="9354312" y="1755648"/>
-            <a:ext cx="2093976" cy="274320"/>
-          </a:xfrm>
-          <a:prstGeom prst="rect">
-            <a:avLst/>
-          </a:prstGeom>
-          <a:noFill/>
-        </p:spPr>
-        <p:txBody>
-          <a:bodyPr wrap="none">
+            <a:off x="9518904" y="1792224"/>
+            <a:ext cx="1581911" cy="411480"/>
+          </a:xfrm>
+          <a:prstGeom prst="rect">
+            <a:avLst/>
+          </a:prstGeom>
+          <a:noFill/>
+        </p:spPr>
+        <p:txBody>
+          <a:bodyPr wrap="square">
             <a:spAutoFit/>
           </a:bodyPr>
           <a:lstStyle/>
           <a:p>
-            <a:r>
-              <a:rPr sz="1500" b="1">
-                <a:solidFill>
-                  <a:srgbClr val="FDBA74"/>
-                </a:solidFill>
-                <a:latin typeface="Arial"/>
-              </a:rPr>
-              <a:t>Passive treatment</a:t>
+            <a:pPr algn="l"/>
+            <a:r>
+              <a:rPr sz="2400" b="1">
+                <a:solidFill>
+                  <a:srgbClr val="FFFFFF"/>
+                </a:solidFill>
+                <a:latin typeface="Arial"/>
+              </a:rPr>
+              <a:t>16.7 kg</a:t>
             </a:r>
           </a:p>
         </p:txBody>
@@ -6482,8 +6645,8 @@
         </p:nvSpPr>
         <p:spPr>
           <a:xfrm>
-            <a:off x="9326880" y="2084832"/>
-            <a:ext cx="2148840" cy="1316736"/>
+            <a:off x="9518904" y="2304288"/>
+            <a:ext cx="1581911" cy="576072"/>
           </a:xfrm>
           <a:prstGeom prst="rect">
             <a:avLst/>
@@ -6492,55 +6655,19 @@
         </p:spPr>
         <p:txBody>
           <a:bodyPr wrap="square">
-            <a:noAutofit/>
-          </a:bodyPr>
-          <a:lstStyle/>
-          <a:p>
-            <a:pPr>
-              <a:spcAft>
-                <a:spcPts val="600"/>
-              </a:spcAft>
-            </a:pPr>
-            <a:r>
-              <a:rPr sz="1300">
-                <a:solidFill>
-                  <a:srgbClr val="E5E7EB"/>
-                </a:solidFill>
-                <a:latin typeface="Arial"/>
-              </a:rPr>
-              <a:t>ALDs, SAPS, wetlands</a:t>
-            </a:r>
-          </a:p>
-          <a:p>
-            <a:pPr>
-              <a:spcAft>
-                <a:spcPts val="600"/>
-              </a:spcAft>
-            </a:pPr>
-            <a:r>
-              <a:rPr sz="1300">
-                <a:solidFill>
-                  <a:srgbClr val="E5E7EB"/>
-                </a:solidFill>
-                <a:latin typeface="Arial"/>
-              </a:rPr>
-              <a:t>Lower O&amp;M</a:t>
-            </a:r>
-          </a:p>
-          <a:p>
-            <a:pPr>
-              <a:spcAft>
-                <a:spcPts val="600"/>
-              </a:spcAft>
-            </a:pPr>
-            <a:r>
-              <a:rPr sz="1300">
-                <a:solidFill>
-                  <a:srgbClr val="E5E7EB"/>
-                </a:solidFill>
-                <a:latin typeface="Arial"/>
-              </a:rPr>
-              <a:t>Needs land and site-specific chemistry</a:t>
+            <a:spAutoFit/>
+          </a:bodyPr>
+          <a:lstStyle/>
+          <a:p>
+            <a:pPr algn="l"/>
+            <a:r>
+              <a:rPr sz="1200" b="0">
+                <a:solidFill>
+                  <a:srgbClr val="94A3B8"/>
+                </a:solidFill>
+                <a:latin typeface="Arial"/>
+              </a:rPr>
+              <a:t>Limestone-equivalent alkalinity for 10 kg of pyrite.</a:t>
             </a:r>
           </a:p>
         </p:txBody>
@@ -6553,8 +6680,8 @@
         </p:nvSpPr>
         <p:spPr>
           <a:xfrm>
-            <a:off x="1737360" y="3794760"/>
-            <a:ext cx="3840480" cy="1645920"/>
+            <a:off x="731520" y="3337560"/>
+            <a:ext cx="5212080" cy="2560320"/>
           </a:xfrm>
           <a:prstGeom prst="roundRect">
             <a:avLst>
@@ -6600,8 +6727,8 @@
         </p:nvSpPr>
         <p:spPr>
           <a:xfrm>
-            <a:off x="1901952" y="3904488"/>
-            <a:ext cx="3511296" cy="274320"/>
+            <a:off x="896112" y="3447288"/>
+            <a:ext cx="4882896" cy="274320"/>
           </a:xfrm>
           <a:prstGeom prst="rect">
             <a:avLst/>
@@ -6621,7 +6748,7 @@
                 </a:solidFill>
                 <a:latin typeface="Arial"/>
               </a:rPr>
-              <a:t>Recovery / reuse</a:t>
+              <a:t>Set-up</a:t>
             </a:r>
           </a:p>
         </p:txBody>
@@ -6634,8 +6761,8 @@
         </p:nvSpPr>
         <p:spPr>
           <a:xfrm>
-            <a:off x="1874520" y="4233672"/>
-            <a:ext cx="3566160" cy="1133856"/>
+            <a:off x="960120" y="3794760"/>
+            <a:ext cx="4709160" cy="1828800"/>
           </a:xfrm>
           <a:prstGeom prst="rect">
             <a:avLst/>
@@ -6654,13 +6781,13 @@
               </a:spcAft>
             </a:pPr>
             <a:r>
-              <a:rPr sz="1300">
+              <a:rPr sz="1600">
                 <a:solidFill>
                   <a:srgbClr val="E5E7EB"/>
                 </a:solidFill>
                 <a:latin typeface="Arial"/>
               </a:rPr>
-              <a:t>Recover rare earths or cobalt from AMD solids where enriched</a:t>
+              <a:t>1 mol pyrite -&gt; about 4 mol H+</a:t>
             </a:r>
           </a:p>
           <a:p>
@@ -6670,13 +6797,45 @@
               </a:spcAft>
             </a:pPr>
             <a:r>
-              <a:rPr sz="1300">
+              <a:rPr sz="1600">
                 <a:solidFill>
                   <a:srgbClr val="E5E7EB"/>
                 </a:solidFill>
                 <a:latin typeface="Arial"/>
               </a:rPr>
-              <a:t>Potential cost offset, but still site-specific and emerging</a:t>
+              <a:t>1 mol CaCO3 neutralizes 2 mol H+</a:t>
+            </a:r>
+          </a:p>
+          <a:p>
+            <a:pPr>
+              <a:spcAft>
+                <a:spcPts val="600"/>
+              </a:spcAft>
+            </a:pPr>
+            <a:r>
+              <a:rPr sz="1600">
+                <a:solidFill>
+                  <a:srgbClr val="E5E7EB"/>
+                </a:solidFill>
+                <a:latin typeface="Arial"/>
+              </a:rPr>
+              <a:t>So 1 mol pyrite needs about 2 mol CaCO3</a:t>
+            </a:r>
+          </a:p>
+          <a:p>
+            <a:pPr>
+              <a:spcAft>
+                <a:spcPts val="600"/>
+              </a:spcAft>
+            </a:pPr>
+            <a:r>
+              <a:rPr sz="1600">
+                <a:solidFill>
+                  <a:srgbClr val="E5E7EB"/>
+                </a:solidFill>
+                <a:latin typeface="Arial"/>
+              </a:rPr>
+              <a:t>Mass ratio = (2 x 100) / 120 = 1.67</a:t>
             </a:r>
           </a:p>
         </p:txBody>
@@ -6689,8 +6848,8 @@
         </p:nvSpPr>
         <p:spPr>
           <a:xfrm>
-            <a:off x="5897880" y="3794760"/>
-            <a:ext cx="3840480" cy="1645920"/>
+            <a:off x="6217920" y="3337560"/>
+            <a:ext cx="4983480" cy="2560320"/>
           </a:xfrm>
           <a:prstGeom prst="roundRect">
             <a:avLst>
@@ -6736,8 +6895,8 @@
         </p:nvSpPr>
         <p:spPr>
           <a:xfrm>
-            <a:off x="6062472" y="3904488"/>
-            <a:ext cx="3511296" cy="274320"/>
+            <a:off x="6382512" y="3447288"/>
+            <a:ext cx="4654296" cy="274320"/>
           </a:xfrm>
           <a:prstGeom prst="rect">
             <a:avLst/>
@@ -6757,7 +6916,7 @@
                 </a:solidFill>
                 <a:latin typeface="Arial"/>
               </a:rPr>
-              <a:t>Practical lesson</a:t>
+              <a:t>Engineering meaning</a:t>
             </a:r>
           </a:p>
         </p:txBody>
@@ -6770,8 +6929,8 @@
         </p:nvSpPr>
         <p:spPr>
           <a:xfrm>
-            <a:off x="6035040" y="4233672"/>
-            <a:ext cx="3566160" cy="1133856"/>
+            <a:off x="6446520" y="3794760"/>
+            <a:ext cx="4526280" cy="1828800"/>
           </a:xfrm>
           <a:prstGeom prst="rect">
             <a:avLst/>
@@ -6790,13 +6949,45 @@
               </a:spcAft>
             </a:pPr>
             <a:r>
-              <a:rPr sz="1300">
+              <a:rPr sz="1600">
                 <a:solidFill>
                   <a:srgbClr val="E5E7EB"/>
                 </a:solidFill>
                 <a:latin typeface="Arial"/>
               </a:rPr>
-              <a:t>Most successful projects combine source control with active or passive polishing rather than using a single method alone</a:t>
+              <a:t>Even small sulfide contents can create large long-term treatment obligations.</a:t>
+            </a:r>
+          </a:p>
+          <a:p>
+            <a:pPr>
+              <a:spcAft>
+                <a:spcPts val="600"/>
+              </a:spcAft>
+            </a:pPr>
+            <a:r>
+              <a:rPr sz="1600">
+                <a:solidFill>
+                  <a:srgbClr val="E5E7EB"/>
+                </a:solidFill>
+                <a:latin typeface="Arial"/>
+              </a:rPr>
+              <a:t>Waste-rock design and source control matter because neutralization demand scales quickly.</a:t>
+            </a:r>
+          </a:p>
+          <a:p>
+            <a:pPr>
+              <a:spcAft>
+                <a:spcPts val="600"/>
+              </a:spcAft>
+            </a:pPr>
+            <a:r>
+              <a:rPr sz="1600">
+                <a:solidFill>
+                  <a:srgbClr val="E5E7EB"/>
+                </a:solidFill>
+                <a:latin typeface="Arial"/>
+              </a:rPr>
+              <a:t>The point is not exact site chemistry, but the order of magnitude of the liability.</a:t>
             </a:r>
           </a:p>
         </p:txBody>
@@ -6810,7 +7001,42 @@
         <p:spPr>
           <a:xfrm>
             <a:off x="777240" y="5897880"/>
-            <a:ext cx="7772400" cy="228600"/>
+            <a:ext cx="10241280" cy="256032"/>
+          </a:xfrm>
+          <a:prstGeom prst="rect">
+            <a:avLst/>
+          </a:prstGeom>
+          <a:noFill/>
+        </p:spPr>
+        <p:txBody>
+          <a:bodyPr wrap="square">
+            <a:spAutoFit/>
+          </a:bodyPr>
+          <a:lstStyle/>
+          <a:p>
+            <a:pPr algn="l"/>
+            <a:r>
+              <a:rPr sz="1000" b="0">
+                <a:solidFill>
+                  <a:srgbClr val="94A3B8"/>
+                </a:solidFill>
+                <a:latin typeface="Arial"/>
+              </a:rPr>
+              <a:t>Sources: OSMRE (2000); Zipper et al. (2023).</a:t>
+            </a:r>
+          </a:p>
+        </p:txBody>
+      </p:sp>
+      <p:sp>
+        <p:nvSpPr>
+          <p:cNvPr id="24" name="TextBox 23"/>
+          <p:cNvSpPr txBox="1"/>
+          <p:nvPr/>
+        </p:nvSpPr>
+        <p:spPr>
+          <a:xfrm>
+            <a:off x="548640" y="6355080"/>
+            <a:ext cx="10972800" cy="228600"/>
           </a:xfrm>
           <a:prstGeom prst="rect">
             <a:avLst/>
@@ -6823,6 +7049,7 @@
           </a:bodyPr>
           <a:lstStyle/>
           <a:p>
+            <a:pPr algn="r"/>
             <a:r>
               <a:rPr sz="1000">
                 <a:solidFill>
@@ -6830,42 +7057,7 @@
                 </a:solidFill>
                 <a:latin typeface="Arial"/>
               </a:rPr>
-              <a:t>Sources: EPA MIW treatment guide; EPA AMD overview; NETL / OSTI summaries.</a:t>
-            </a:r>
-          </a:p>
-        </p:txBody>
-      </p:sp>
-      <p:sp>
-        <p:nvSpPr>
-          <p:cNvPr id="24" name="TextBox 23"/>
-          <p:cNvSpPr txBox="1"/>
-          <p:nvPr/>
-        </p:nvSpPr>
-        <p:spPr>
-          <a:xfrm>
-            <a:off x="548640" y="6355080"/>
-            <a:ext cx="10972800" cy="228600"/>
-          </a:xfrm>
-          <a:prstGeom prst="rect">
-            <a:avLst/>
-          </a:prstGeom>
-          <a:noFill/>
-        </p:spPr>
-        <p:txBody>
-          <a:bodyPr wrap="none">
-            <a:spAutoFit/>
-          </a:bodyPr>
-          <a:lstStyle/>
-          <a:p>
-            <a:pPr algn="r"/>
-            <a:r>
-              <a:rPr sz="1000">
-                <a:solidFill>
-                  <a:srgbClr val="94A3B8"/>
-                </a:solidFill>
-                <a:latin typeface="Arial"/>
-              </a:rPr>
-              <a:t>AMD draft deck | Slide 5</a:t>
+              <a:t>Group 7 | AMD presentation | Slide 5</a:t>
             </a:r>
           </a:p>
         </p:txBody>
@@ -6905,7 +7097,7 @@
         <p:spPr>
           <a:xfrm>
             <a:off x="548640" y="320040"/>
-            <a:ext cx="3657600" cy="274320"/>
+            <a:ext cx="4754880" cy="274320"/>
           </a:xfrm>
           <a:prstGeom prst="rect">
             <a:avLst/>
@@ -6925,7 +7117,7 @@
                 </a:solidFill>
                 <a:latin typeface="Arial"/>
               </a:rPr>
-              <a:t>ECONOMICS</a:t>
+              <a:t>CASE STUDY</a:t>
             </a:r>
           </a:p>
         </p:txBody>
@@ -6939,7 +7131,7 @@
         <p:spPr>
           <a:xfrm>
             <a:off x="548640" y="594360"/>
-            <a:ext cx="10607040" cy="640080"/>
+            <a:ext cx="10789920" cy="685800"/>
           </a:xfrm>
           <a:prstGeom prst="rect">
             <a:avLst/>
@@ -6959,7 +7151,7 @@
                 </a:solidFill>
                 <a:latin typeface="Arial"/>
               </a:rPr>
-              <a:t>Economics, costs, and financing</a:t>
+              <a:t>Iron Mountain Mine, California</a:t>
             </a:r>
           </a:p>
         </p:txBody>
@@ -6973,7 +7165,7 @@
         <p:spPr>
           <a:xfrm>
             <a:off x="548640" y="1298448"/>
-            <a:ext cx="2011680" cy="73152"/>
+            <a:ext cx="2377440" cy="73152"/>
           </a:xfrm>
           <a:prstGeom prst="rect">
             <a:avLst/>
@@ -7015,8 +7207,8 @@
         </p:nvSpPr>
         <p:spPr>
           <a:xfrm>
-            <a:off x="685800" y="1691640"/>
-            <a:ext cx="3383280" cy="1371600"/>
+            <a:off x="749808" y="1645920"/>
+            <a:ext cx="2377440" cy="1325880"/>
           </a:xfrm>
           <a:prstGeom prst="roundRect">
             <a:avLst>
@@ -7062,42 +7254,8 @@
         </p:nvSpPr>
         <p:spPr>
           <a:xfrm>
-            <a:off x="832104" y="1837944"/>
-            <a:ext cx="3090672" cy="457200"/>
-          </a:xfrm>
-          <a:prstGeom prst="rect">
-            <a:avLst/>
-          </a:prstGeom>
-          <a:noFill/>
-        </p:spPr>
-        <p:txBody>
-          <a:bodyPr wrap="none">
-            <a:spAutoFit/>
-          </a:bodyPr>
-          <a:lstStyle/>
-          <a:p>
-            <a:r>
-              <a:rPr sz="2400" b="1">
-                <a:solidFill>
-                  <a:srgbClr val="FFFFFF"/>
-                </a:solidFill>
-                <a:latin typeface="Arial"/>
-              </a:rPr>
-              <a:t>$34 / ton</a:t>
-            </a:r>
-          </a:p>
-        </p:txBody>
-      </p:sp>
-      <p:sp>
-        <p:nvSpPr>
-          <p:cNvPr id="7" name="TextBox 6"/>
-          <p:cNvSpPr txBox="1"/>
-          <p:nvPr/>
-        </p:nvSpPr>
-        <p:spPr>
-          <a:xfrm>
-            <a:off x="832104" y="2350008"/>
-            <a:ext cx="3090672" cy="566928"/>
+            <a:off x="896112" y="1773936"/>
+            <a:ext cx="2084832" cy="411480"/>
           </a:xfrm>
           <a:prstGeom prst="rect">
             <a:avLst/>
@@ -7110,14 +7268,50 @@
           </a:bodyPr>
           <a:lstStyle/>
           <a:p>
-            <a:r>
-              <a:rPr sz="1200">
+            <a:pPr algn="l"/>
+            <a:r>
+              <a:rPr sz="2400" b="1">
+                <a:solidFill>
+                  <a:srgbClr val="FFFFFF"/>
+                </a:solidFill>
+                <a:latin typeface="Arial"/>
+              </a:rPr>
+              <a:t>pH -3.6</a:t>
+            </a:r>
+          </a:p>
+        </p:txBody>
+      </p:sp>
+      <p:sp>
+        <p:nvSpPr>
+          <p:cNvPr id="7" name="TextBox 6"/>
+          <p:cNvSpPr txBox="1"/>
+          <p:nvPr/>
+        </p:nvSpPr>
+        <p:spPr>
+          <a:xfrm>
+            <a:off x="896112" y="2286000"/>
+            <a:ext cx="2084832" cy="576072"/>
+          </a:xfrm>
+          <a:prstGeom prst="rect">
+            <a:avLst/>
+          </a:prstGeom>
+          <a:noFill/>
+        </p:spPr>
+        <p:txBody>
+          <a:bodyPr wrap="square">
+            <a:spAutoFit/>
+          </a:bodyPr>
+          <a:lstStyle/>
+          <a:p>
+            <a:pPr algn="l"/>
+            <a:r>
+              <a:rPr sz="1200" b="0">
                 <a:solidFill>
                   <a:srgbClr val="94A3B8"/>
                 </a:solidFill>
                 <a:latin typeface="Arial"/>
               </a:rPr>
-              <a:t>EPA example cost for in situ limestone drain acid-load treatment.</a:t>
+              <a:t>Reported by USGS in Richmond Mine waters - one of the most extreme AMD measurements recorded.</a:t>
             </a:r>
           </a:p>
         </p:txBody>
@@ -7130,8 +7324,8 @@
         </p:nvSpPr>
         <p:spPr>
           <a:xfrm>
-            <a:off x="4434840" y="1691640"/>
-            <a:ext cx="2926080" cy="1371600"/>
+            <a:off x="3383280" y="1645920"/>
+            <a:ext cx="2377440" cy="1325880"/>
           </a:xfrm>
           <a:prstGeom prst="roundRect">
             <a:avLst>
@@ -7177,42 +7371,8 @@
         </p:nvSpPr>
         <p:spPr>
           <a:xfrm>
-            <a:off x="4581144" y="1837944"/>
-            <a:ext cx="2633472" cy="457200"/>
-          </a:xfrm>
-          <a:prstGeom prst="rect">
-            <a:avLst/>
-          </a:prstGeom>
-          <a:noFill/>
-        </p:spPr>
-        <p:txBody>
-          <a:bodyPr wrap="none">
-            <a:spAutoFit/>
-          </a:bodyPr>
-          <a:lstStyle/>
-          <a:p>
-            <a:r>
-              <a:rPr sz="2400" b="1">
-                <a:solidFill>
-                  <a:srgbClr val="FFFFFF"/>
-                </a:solidFill>
-                <a:latin typeface="Arial"/>
-              </a:rPr>
-              <a:t>$441 / ton</a:t>
-            </a:r>
-          </a:p>
-        </p:txBody>
-      </p:sp>
-      <p:sp>
-        <p:nvSpPr>
-          <p:cNvPr id="10" name="TextBox 9"/>
-          <p:cNvSpPr txBox="1"/>
-          <p:nvPr/>
-        </p:nvSpPr>
-        <p:spPr>
-          <a:xfrm>
-            <a:off x="4581144" y="2350008"/>
-            <a:ext cx="2633472" cy="566928"/>
+            <a:off x="3529584" y="1773936"/>
+            <a:ext cx="2084832" cy="411480"/>
           </a:xfrm>
           <a:prstGeom prst="rect">
             <a:avLst/>
@@ -7225,14 +7385,50 @@
           </a:bodyPr>
           <a:lstStyle/>
           <a:p>
-            <a:r>
-              <a:rPr sz="1200">
+            <a:pPr algn="l"/>
+            <a:r>
+              <a:rPr sz="2400" b="1">
+                <a:solidFill>
+                  <a:srgbClr val="FFFFFF"/>
+                </a:solidFill>
+                <a:latin typeface="Arial"/>
+              </a:rPr>
+              <a:t>200 g/L metals</a:t>
+            </a:r>
+          </a:p>
+        </p:txBody>
+      </p:sp>
+      <p:sp>
+        <p:nvSpPr>
+          <p:cNvPr id="10" name="TextBox 9"/>
+          <p:cNvSpPr txBox="1"/>
+          <p:nvPr/>
+        </p:nvSpPr>
+        <p:spPr>
+          <a:xfrm>
+            <a:off x="3529584" y="2286000"/>
+            <a:ext cx="2084832" cy="576072"/>
+          </a:xfrm>
+          <a:prstGeom prst="rect">
+            <a:avLst/>
+          </a:prstGeom>
+          <a:noFill/>
+        </p:spPr>
+        <p:txBody>
+          <a:bodyPr wrap="square">
+            <a:spAutoFit/>
+          </a:bodyPr>
+          <a:lstStyle/>
+          <a:p>
+            <a:pPr algn="l"/>
+            <a:r>
+              <a:rPr sz="1200" b="0">
                 <a:solidFill>
                   <a:srgbClr val="94A3B8"/>
                 </a:solidFill>
                 <a:latin typeface="Arial"/>
               </a:rPr>
-              <a:t>Comparable conventional caustic soda treatment cost in the same example.</a:t>
+              <a:t>Peak dissolved metal concentrations reported in mine workings.</a:t>
             </a:r>
           </a:p>
         </p:txBody>
@@ -7245,8 +7441,8 @@
         </p:nvSpPr>
         <p:spPr>
           <a:xfrm>
-            <a:off x="7726679" y="1691640"/>
-            <a:ext cx="3200400" cy="1371600"/>
+            <a:off x="6016752" y="1645920"/>
+            <a:ext cx="2377440" cy="1325880"/>
           </a:xfrm>
           <a:prstGeom prst="roundRect">
             <a:avLst>
@@ -7292,42 +7488,8 @@
         </p:nvSpPr>
         <p:spPr>
           <a:xfrm>
-            <a:off x="7872983" y="1837944"/>
-            <a:ext cx="2907792" cy="457200"/>
-          </a:xfrm>
-          <a:prstGeom prst="rect">
-            <a:avLst/>
-          </a:prstGeom>
-          <a:noFill/>
-        </p:spPr>
-        <p:txBody>
-          <a:bodyPr wrap="none">
-            <a:spAutoFit/>
-          </a:bodyPr>
-          <a:lstStyle/>
-          <a:p>
-            <a:r>
-              <a:rPr sz="2400" b="1">
-                <a:solidFill>
-                  <a:srgbClr val="FFFFFF"/>
-                </a:solidFill>
-                <a:latin typeface="Arial"/>
-              </a:rPr>
-              <a:t>$5,700 / km / year</a:t>
-            </a:r>
-          </a:p>
-        </p:txBody>
-      </p:sp>
-      <p:sp>
-        <p:nvSpPr>
-          <p:cNvPr id="13" name="TextBox 12"/>
-          <p:cNvSpPr txBox="1"/>
-          <p:nvPr/>
-        </p:nvSpPr>
-        <p:spPr>
-          <a:xfrm>
-            <a:off x="7872983" y="2350008"/>
-            <a:ext cx="2907792" cy="566928"/>
+            <a:off x="6163056" y="1773936"/>
+            <a:ext cx="2084832" cy="411480"/>
           </a:xfrm>
           <a:prstGeom prst="rect">
             <a:avLst/>
@@ -7340,14 +7502,50 @@
           </a:bodyPr>
           <a:lstStyle/>
           <a:p>
-            <a:r>
-              <a:rPr sz="1200">
+            <a:pPr algn="l"/>
+            <a:r>
+              <a:rPr sz="2400" b="1">
+                <a:solidFill>
+                  <a:srgbClr val="FFFFFF"/>
+                </a:solidFill>
+                <a:latin typeface="Arial"/>
+              </a:rPr>
+              <a:t>760 g/L sulfate</a:t>
+            </a:r>
+          </a:p>
+        </p:txBody>
+      </p:sp>
+      <p:sp>
+        <p:nvSpPr>
+          <p:cNvPr id="13" name="TextBox 12"/>
+          <p:cNvSpPr txBox="1"/>
+          <p:nvPr/>
+        </p:nvSpPr>
+        <p:spPr>
+          <a:xfrm>
+            <a:off x="6163056" y="2286000"/>
+            <a:ext cx="2084832" cy="576072"/>
+          </a:xfrm>
+          <a:prstGeom prst="rect">
+            <a:avLst/>
+          </a:prstGeom>
+          <a:noFill/>
+        </p:spPr>
+        <p:txBody>
+          <a:bodyPr wrap="square">
+            <a:spAutoFit/>
+          </a:bodyPr>
+          <a:lstStyle/>
+          <a:p>
+            <a:pPr algn="l"/>
+            <a:r>
+              <a:rPr sz="1200" b="0">
                 <a:solidFill>
                   <a:srgbClr val="94A3B8"/>
                 </a:solidFill>
                 <a:latin typeface="Arial"/>
               </a:rPr>
-              <a:t>Estimated stream-protection cost from Pennsylvania treatment-system analysis.</a:t>
+              <a:t>Illustrates how chemically concentrated AMD can become.</a:t>
             </a:r>
           </a:p>
         </p:txBody>
@@ -7360,8 +7558,8 @@
         </p:nvSpPr>
         <p:spPr>
           <a:xfrm>
-            <a:off x="685800" y="3383280"/>
-            <a:ext cx="5166360" cy="2240280"/>
+            <a:off x="8650224" y="1645920"/>
+            <a:ext cx="2377440" cy="1325880"/>
           </a:xfrm>
           <a:prstGeom prst="roundRect">
             <a:avLst>
@@ -7407,28 +7605,29 @@
         </p:nvSpPr>
         <p:spPr>
           <a:xfrm>
-            <a:off x="850392" y="3493008"/>
-            <a:ext cx="4837176" cy="274320"/>
-          </a:xfrm>
-          <a:prstGeom prst="rect">
-            <a:avLst/>
-          </a:prstGeom>
-          <a:noFill/>
-        </p:spPr>
-        <p:txBody>
-          <a:bodyPr wrap="none">
+            <a:off x="8796528" y="1773936"/>
+            <a:ext cx="2084832" cy="411480"/>
+          </a:xfrm>
+          <a:prstGeom prst="rect">
+            <a:avLst/>
+          </a:prstGeom>
+          <a:noFill/>
+        </p:spPr>
+        <p:txBody>
+          <a:bodyPr wrap="square">
             <a:spAutoFit/>
           </a:bodyPr>
           <a:lstStyle/>
           <a:p>
-            <a:r>
-              <a:rPr sz="1500" b="1">
-                <a:solidFill>
-                  <a:srgbClr val="FDBA74"/>
-                </a:solidFill>
-                <a:latin typeface="Arial"/>
-              </a:rPr>
-              <a:t>Cost drivers</a:t>
+            <a:pPr algn="l"/>
+            <a:r>
+              <a:rPr sz="2400" b="1">
+                <a:solidFill>
+                  <a:srgbClr val="FFFFFF"/>
+                </a:solidFill>
+                <a:latin typeface="Arial"/>
+              </a:rPr>
+              <a:t>400 million gal/yr</a:t>
             </a:r>
           </a:p>
         </p:txBody>
@@ -7441,8 +7640,8 @@
         </p:nvSpPr>
         <p:spPr>
           <a:xfrm>
-            <a:off x="868680" y="3794760"/>
-            <a:ext cx="4800600" cy="1645920"/>
+            <a:off x="8796528" y="2286000"/>
+            <a:ext cx="2084832" cy="576072"/>
           </a:xfrm>
           <a:prstGeom prst="rect">
             <a:avLst/>
@@ -7451,55 +7650,19 @@
         </p:spPr>
         <p:txBody>
           <a:bodyPr wrap="square">
-            <a:noAutofit/>
-          </a:bodyPr>
-          <a:lstStyle/>
-          <a:p>
-            <a:pPr>
-              <a:spcAft>
-                <a:spcPts val="600"/>
-              </a:spcAft>
-            </a:pPr>
-            <a:r>
-              <a:rPr sz="1500">
-                <a:solidFill>
-                  <a:srgbClr val="E5E7EB"/>
-                </a:solidFill>
-                <a:latin typeface="Arial"/>
-              </a:rPr>
-              <a:t>Active systems trade reliability for recurring energy, chemical, labor, and sludge costs.</a:t>
-            </a:r>
-          </a:p>
-          <a:p>
-            <a:pPr>
-              <a:spcAft>
-                <a:spcPts val="600"/>
-              </a:spcAft>
-            </a:pPr>
-            <a:r>
-              <a:rPr sz="1500">
-                <a:solidFill>
-                  <a:srgbClr val="E5E7EB"/>
-                </a:solidFill>
-                <a:latin typeface="Arial"/>
-              </a:rPr>
-              <a:t>Passive systems lower O&amp;M but need land, maintenance, and favorable geochemistry.</a:t>
-            </a:r>
-          </a:p>
-          <a:p>
-            <a:pPr>
-              <a:spcAft>
-                <a:spcPts val="600"/>
-              </a:spcAft>
-            </a:pPr>
-            <a:r>
-              <a:rPr sz="1500">
-                <a:solidFill>
-                  <a:srgbClr val="E5E7EB"/>
-                </a:solidFill>
-                <a:latin typeface="Arial"/>
-              </a:rPr>
-              <a:t>Bonding and financial assurance must account for long-term post-closure water treatment.</a:t>
+            <a:spAutoFit/>
+          </a:bodyPr>
+          <a:lstStyle/>
+          <a:p>
+            <a:pPr algn="l"/>
+            <a:r>
+              <a:rPr sz="1200" b="0">
+                <a:solidFill>
+                  <a:srgbClr val="94A3B8"/>
+                </a:solidFill>
+                <a:latin typeface="Arial"/>
+              </a:rPr>
+              <a:t>Average AMD treated each year at the Minnesota Flats Treatment Plant.</a:t>
             </a:r>
           </a:p>
         </p:txBody>
@@ -7512,8 +7675,8 @@
         </p:nvSpPr>
         <p:spPr>
           <a:xfrm>
-            <a:off x="6172200" y="3383280"/>
-            <a:ext cx="4754880" cy="2240280"/>
+            <a:off x="749808" y="3291840"/>
+            <a:ext cx="5303520" cy="2651760"/>
           </a:xfrm>
           <a:prstGeom prst="roundRect">
             <a:avLst>
@@ -7559,8 +7722,8 @@
         </p:nvSpPr>
         <p:spPr>
           <a:xfrm>
-            <a:off x="6336792" y="3493008"/>
-            <a:ext cx="4425696" cy="274320"/>
+            <a:off x="914400" y="3401568"/>
+            <a:ext cx="4974336" cy="274320"/>
           </a:xfrm>
           <a:prstGeom prst="rect">
             <a:avLst/>
@@ -7580,7 +7743,7 @@
                 </a:solidFill>
                 <a:latin typeface="Arial"/>
               </a:rPr>
-              <a:t>Financing implication</a:t>
+              <a:t>Why this case matters</a:t>
             </a:r>
           </a:p>
         </p:txBody>
@@ -7593,8 +7756,8 @@
         </p:nvSpPr>
         <p:spPr>
           <a:xfrm>
-            <a:off x="6355080" y="3794760"/>
-            <a:ext cx="4389120" cy="1645920"/>
+            <a:off x="978408" y="3703320"/>
+            <a:ext cx="4846320" cy="1920240"/>
           </a:xfrm>
           <a:prstGeom prst="rect">
             <a:avLst/>
@@ -7613,13 +7776,13 @@
               </a:spcAft>
             </a:pPr>
             <a:r>
-              <a:rPr sz="1500">
+              <a:rPr sz="1600">
                 <a:solidFill>
                   <a:srgbClr val="E5E7EB"/>
                 </a:solidFill>
                 <a:latin typeface="Arial"/>
               </a:rPr>
-              <a:t>AMD is often a decades-long liability rather than a one-time capex item.</a:t>
+              <a:t>EPA once described the site as releasing more than one ton of toxic metals per day.</a:t>
             </a:r>
           </a:p>
           <a:p>
@@ -7629,13 +7792,13 @@
               </a:spcAft>
             </a:pPr>
             <a:r>
-              <a:rPr sz="1500">
+              <a:rPr sz="1600">
                 <a:solidFill>
                   <a:srgbClr val="E5E7EB"/>
                 </a:solidFill>
                 <a:latin typeface="Arial"/>
               </a:rPr>
-              <a:t>Public AML funds frequently fill abandoned-site gaps.</a:t>
+              <a:t>The Sacramento River watershed suffered major ecological damage before large-scale remediation.</a:t>
             </a:r>
           </a:p>
           <a:p>
@@ -7645,27 +7808,74 @@
               </a:spcAft>
             </a:pPr>
             <a:r>
-              <a:rPr sz="1500">
+              <a:rPr sz="1600">
                 <a:solidFill>
                   <a:srgbClr val="E5E7EB"/>
                 </a:solidFill>
                 <a:latin typeface="Arial"/>
               </a:rPr>
-              <a:t>Critical-mineral recovery is promising as an offset, but should not be the only funding assumption.</a:t>
-            </a:r>
-          </a:p>
-        </p:txBody>
-      </p:sp>
-      <p:sp>
-        <p:nvSpPr>
-          <p:cNvPr id="20" name="TextBox 19"/>
-          <p:cNvSpPr txBox="1"/>
-          <p:nvPr/>
-        </p:nvSpPr>
-        <p:spPr>
-          <a:xfrm>
-            <a:off x="777240" y="5897880"/>
-            <a:ext cx="9144000" cy="228600"/>
+              <a:t>Iron Mountain shows how AMD becomes permanent infrastructure, not a short-term fix.</a:t>
+            </a:r>
+          </a:p>
+        </p:txBody>
+      </p:sp>
+      <p:sp>
+        <p:nvSpPr>
+          <p:cNvPr id="20" name="Rounded Rectangle 19"/>
+          <p:cNvSpPr/>
+          <p:nvPr/>
+        </p:nvSpPr>
+        <p:spPr>
+          <a:xfrm>
+            <a:off x="6309360" y="3291840"/>
+            <a:ext cx="5120640" cy="2651760"/>
+          </a:xfrm>
+          <a:prstGeom prst="roundRect">
+            <a:avLst>
+              <a:gd name="adj" fmla="val 8000"/>
+            </a:avLst>
+          </a:prstGeom>
+          <a:solidFill>
+            <a:srgbClr val="111827"/>
+          </a:solidFill>
+          <a:ln w="12700">
+            <a:solidFill>
+              <a:srgbClr val="334155"/>
+            </a:solidFill>
+          </a:ln>
+        </p:spPr>
+        <p:style>
+          <a:lnRef idx="1">
+            <a:schemeClr val="accent1"/>
+          </a:lnRef>
+          <a:fillRef idx="3">
+            <a:schemeClr val="accent1"/>
+          </a:fillRef>
+          <a:effectRef idx="2">
+            <a:schemeClr val="accent1"/>
+          </a:effectRef>
+          <a:fontRef idx="minor">
+            <a:schemeClr val="lt1"/>
+          </a:fontRef>
+        </p:style>
+        <p:txBody>
+          <a:bodyPr rtlCol="0" anchor="ctr"/>
+          <a:lstStyle/>
+          <a:p>
+            <a:pPr algn="ctr"/>
+          </a:p>
+        </p:txBody>
+      </p:sp>
+      <p:sp>
+        <p:nvSpPr>
+          <p:cNvPr id="21" name="TextBox 20"/>
+          <p:cNvSpPr txBox="1"/>
+          <p:nvPr/>
+        </p:nvSpPr>
+        <p:spPr>
+          <a:xfrm>
+            <a:off x="6473952" y="3401568"/>
+            <a:ext cx="4791456" cy="274320"/>
           </a:xfrm>
           <a:prstGeom prst="rect">
             <a:avLst/>
@@ -7679,20 +7889,126 @@
           <a:lstStyle/>
           <a:p>
             <a:r>
-              <a:rPr sz="1000">
+              <a:rPr sz="1500" b="1">
+                <a:solidFill>
+                  <a:srgbClr val="FDBA74"/>
+                </a:solidFill>
+                <a:latin typeface="Arial"/>
+              </a:rPr>
+              <a:t>Management lesson</a:t>
+            </a:r>
+          </a:p>
+        </p:txBody>
+      </p:sp>
+      <p:sp>
+        <p:nvSpPr>
+          <p:cNvPr id="22" name="TextBox 21"/>
+          <p:cNvSpPr txBox="1"/>
+          <p:nvPr/>
+        </p:nvSpPr>
+        <p:spPr>
+          <a:xfrm>
+            <a:off x="6537960" y="3703320"/>
+            <a:ext cx="4663440" cy="1920240"/>
+          </a:xfrm>
+          <a:prstGeom prst="rect">
+            <a:avLst/>
+          </a:prstGeom>
+          <a:noFill/>
+        </p:spPr>
+        <p:txBody>
+          <a:bodyPr wrap="square">
+            <a:noAutofit/>
+          </a:bodyPr>
+          <a:lstStyle/>
+          <a:p>
+            <a:pPr>
+              <a:spcAft>
+                <a:spcPts val="600"/>
+              </a:spcAft>
+            </a:pPr>
+            <a:r>
+              <a:rPr sz="1600">
+                <a:solidFill>
+                  <a:srgbClr val="E5E7EB"/>
+                </a:solidFill>
+                <a:latin typeface="Arial"/>
+              </a:rPr>
+              <a:t>The permanent treatment plant began operating in 1994 and later shifted to high-density sludge processing.</a:t>
+            </a:r>
+          </a:p>
+          <a:p>
+            <a:pPr>
+              <a:spcAft>
+                <a:spcPts val="600"/>
+              </a:spcAft>
+            </a:pPr>
+            <a:r>
+              <a:rPr sz="1600">
+                <a:solidFill>
+                  <a:srgbClr val="E5E7EB"/>
+                </a:solidFill>
+                <a:latin typeface="Arial"/>
+              </a:rPr>
+              <a:t>EPA notes cleanup has involved treatment of more than 8 billion gallons of acidic drainage over time.</a:t>
+            </a:r>
+          </a:p>
+          <a:p>
+            <a:pPr>
+              <a:spcAft>
+                <a:spcPts val="600"/>
+              </a:spcAft>
+            </a:pPr>
+            <a:r>
+              <a:rPr sz="1600">
+                <a:solidFill>
+                  <a:srgbClr val="E5E7EB"/>
+                </a:solidFill>
+                <a:latin typeface="Arial"/>
+              </a:rPr>
+              <a:t>Once AMD reaches this scale, cleanup requires long-term funding, operations, and oversight.</a:t>
+            </a:r>
+          </a:p>
+        </p:txBody>
+      </p:sp>
+      <p:sp>
+        <p:nvSpPr>
+          <p:cNvPr id="23" name="TextBox 22"/>
+          <p:cNvSpPr txBox="1"/>
+          <p:nvPr/>
+        </p:nvSpPr>
+        <p:spPr>
+          <a:xfrm>
+            <a:off x="777240" y="5897880"/>
+            <a:ext cx="10241280" cy="256032"/>
+          </a:xfrm>
+          <a:prstGeom prst="rect">
+            <a:avLst/>
+          </a:prstGeom>
+          <a:noFill/>
+        </p:spPr>
+        <p:txBody>
+          <a:bodyPr wrap="square">
+            <a:spAutoFit/>
+          </a:bodyPr>
+          <a:lstStyle/>
+          <a:p>
+            <a:pPr algn="l"/>
+            <a:r>
+              <a:rPr sz="1000" b="0">
                 <a:solidFill>
                   <a:srgbClr val="94A3B8"/>
                 </a:solidFill>
                 <a:latin typeface="Arial"/>
               </a:rPr>
-              <a:t>Sources: EPA SBIR limestone-drain example; Communications Earth &amp; Environment (2024); EPA MIW treatment guide.</a:t>
-            </a:r>
-          </a:p>
-        </p:txBody>
-      </p:sp>
-      <p:sp>
-        <p:nvSpPr>
-          <p:cNvPr id="21" name="TextBox 20"/>
+              <a:t>Sources: Nordstrom and Alpers (1999); Nordstrom et al. (2000); U.S. EPA (2006) and Iron Mountain site summaries.</a:t>
+            </a:r>
+          </a:p>
+        </p:txBody>
+      </p:sp>
+      <p:sp>
+        <p:nvSpPr>
+          <p:cNvPr id="24" name="TextBox 23"/>
           <p:cNvSpPr txBox="1"/>
           <p:nvPr/>
         </p:nvSpPr>
@@ -7720,7 +8036,7 @@
                 </a:solidFill>
                 <a:latin typeface="Arial"/>
               </a:rPr>
-              <a:t>AMD draft deck | Slide 6</a:t>
+              <a:t>Group 7 | AMD presentation | Slide 6</a:t>
             </a:r>
           </a:p>
         </p:txBody>
@@ -7760,7 +8076,7 @@
         <p:spPr>
           <a:xfrm>
             <a:off x="548640" y="320040"/>
-            <a:ext cx="3657600" cy="274320"/>
+            <a:ext cx="4754880" cy="274320"/>
           </a:xfrm>
           <a:prstGeom prst="rect">
             <a:avLst/>
@@ -7780,7 +8096,7 @@
                 </a:solidFill>
                 <a:latin typeface="Arial"/>
               </a:rPr>
-              <a:t>REGULATION</a:t>
+              <a:t>SOLUTIONS</a:t>
             </a:r>
           </a:p>
         </p:txBody>
@@ -7794,7 +8110,7 @@
         <p:spPr>
           <a:xfrm>
             <a:off x="548640" y="594360"/>
-            <a:ext cx="10607040" cy="640080"/>
+            <a:ext cx="10789920" cy="685800"/>
           </a:xfrm>
           <a:prstGeom prst="rect">
             <a:avLst/>
@@ -7814,7 +8130,7 @@
                 </a:solidFill>
                 <a:latin typeface="Arial"/>
               </a:rPr>
-              <a:t>Laws and regulations</a:t>
+              <a:t>Technological solutions and alternatives</a:t>
             </a:r>
           </a:p>
         </p:txBody>
@@ -7828,7 +8144,7 @@
         <p:spPr>
           <a:xfrm>
             <a:off x="548640" y="1298448"/>
-            <a:ext cx="2011680" cy="73152"/>
+            <a:ext cx="2377440" cy="73152"/>
           </a:xfrm>
           <a:prstGeom prst="rect">
             <a:avLst/>
@@ -7870,8 +8186,8 @@
         </p:nvSpPr>
         <p:spPr>
           <a:xfrm>
-            <a:off x="685800" y="1691640"/>
-            <a:ext cx="5303520" cy="4480560"/>
+            <a:off x="640080" y="1664208"/>
+            <a:ext cx="3520440" cy="2011680"/>
           </a:xfrm>
           <a:prstGeom prst="roundRect">
             <a:avLst>
@@ -7917,8 +8233,8 @@
         </p:nvSpPr>
         <p:spPr>
           <a:xfrm>
-            <a:off x="850392" y="1801368"/>
-            <a:ext cx="4974336" cy="274320"/>
+            <a:off x="804672" y="1773936"/>
+            <a:ext cx="3191256" cy="274320"/>
           </a:xfrm>
           <a:prstGeom prst="rect">
             <a:avLst/>
@@ -7938,7 +8254,7 @@
                 </a:solidFill>
                 <a:latin typeface="Arial"/>
               </a:rPr>
-              <a:t>United States</a:t>
+              <a:t>Prevention at the source</a:t>
             </a:r>
           </a:p>
         </p:txBody>
@@ -7951,8 +8267,8 @@
         </p:nvSpPr>
         <p:spPr>
           <a:xfrm>
-            <a:off x="914400" y="2103120"/>
-            <a:ext cx="4846320" cy="3749039"/>
+            <a:off x="822960" y="2103120"/>
+            <a:ext cx="3172968" cy="1463040"/>
           </a:xfrm>
           <a:prstGeom prst="rect">
             <a:avLst/>
@@ -7971,13 +8287,13 @@
               </a:spcAft>
             </a:pPr>
             <a:r>
-              <a:rPr sz="1500">
+              <a:rPr sz="1400">
                 <a:solidFill>
                   <a:srgbClr val="E5E7EB"/>
                 </a:solidFill>
                 <a:latin typeface="Arial"/>
               </a:rPr>
-              <a:t>Clean Water Act / NPDES permits regulate mine-water discharges.</a:t>
+              <a:t>Keep oxygen and water away from reactive sulfide materials.</a:t>
             </a:r>
           </a:p>
           <a:p>
@@ -7987,13 +8303,13 @@
               </a:spcAft>
             </a:pPr>
             <a:r>
-              <a:rPr sz="1500">
+              <a:rPr sz="1400">
                 <a:solidFill>
                   <a:srgbClr val="E5E7EB"/>
                 </a:solidFill>
                 <a:latin typeface="Arial"/>
               </a:rPr>
-              <a:t>40 CFR Part 434 covers acid or ferruginous mine drainage and related coal-mining subcategories.</a:t>
+              <a:t>Use covers, diversion ditches, sealing, and better waste storage design.</a:t>
             </a:r>
           </a:p>
           <a:p>
@@ -8003,45 +8319,13 @@
               </a:spcAft>
             </a:pPr>
             <a:r>
-              <a:rPr sz="1500">
+              <a:rPr sz="1400">
                 <a:solidFill>
                   <a:srgbClr val="E5E7EB"/>
                 </a:solidFill>
                 <a:latin typeface="Arial"/>
               </a:rPr>
-              <a:t>Illustrative new-source limits: total iron 6.0 mg/L daily max, 3.0 mg/L 30-day average; manganese 4.0 / 2.0; TSS 70 / 35; pH 6.0-9.0.</a:t>
-            </a:r>
-          </a:p>
-          <a:p>
-            <a:pPr>
-              <a:spcAft>
-                <a:spcPts val="600"/>
-              </a:spcAft>
-            </a:pPr>
-            <a:r>
-              <a:rPr sz="1500">
-                <a:solidFill>
-                  <a:srgbClr val="E5E7EB"/>
-                </a:solidFill>
-                <a:latin typeface="Arial"/>
-              </a:rPr>
-              <a:t>SMCRA and abandoned mine land programs support reclamation and AMD abatement.</a:t>
-            </a:r>
-          </a:p>
-          <a:p>
-            <a:pPr>
-              <a:spcAft>
-                <a:spcPts val="600"/>
-              </a:spcAft>
-            </a:pPr>
-            <a:r>
-              <a:rPr sz="1500">
-                <a:solidFill>
-                  <a:srgbClr val="E5E7EB"/>
-                </a:solidFill>
-                <a:latin typeface="Arial"/>
-              </a:rPr>
-              <a:t>CERCLA / Superfund applies at major contaminated legacy sites.</a:t>
+              <a:t>Best option when feasible because it stops AMD before it forms.</a:t>
             </a:r>
           </a:p>
         </p:txBody>
@@ -8054,8 +8338,8 @@
         </p:nvSpPr>
         <p:spPr>
           <a:xfrm>
-            <a:off x="6217920" y="1691640"/>
-            <a:ext cx="4754880" cy="4480560"/>
+            <a:off x="4334256" y="1664208"/>
+            <a:ext cx="3520440" cy="2011680"/>
           </a:xfrm>
           <a:prstGeom prst="roundRect">
             <a:avLst>
@@ -8101,8 +8385,8 @@
         </p:nvSpPr>
         <p:spPr>
           <a:xfrm>
-            <a:off x="6382512" y="1801368"/>
-            <a:ext cx="4425696" cy="274320"/>
+            <a:off x="4498848" y="1773936"/>
+            <a:ext cx="3191256" cy="274320"/>
           </a:xfrm>
           <a:prstGeom prst="rect">
             <a:avLst/>
@@ -8122,7 +8406,7 @@
                 </a:solidFill>
                 <a:latin typeface="Arial"/>
               </a:rPr>
-              <a:t>European Union / international</a:t>
+              <a:t>Active treatment</a:t>
             </a:r>
           </a:p>
         </p:txBody>
@@ -8135,8 +8419,8 @@
         </p:nvSpPr>
         <p:spPr>
           <a:xfrm>
-            <a:off x="6446520" y="2103120"/>
-            <a:ext cx="4297680" cy="3749039"/>
+            <a:off x="4517136" y="2103120"/>
+            <a:ext cx="3172968" cy="1463040"/>
           </a:xfrm>
           <a:prstGeom prst="rect">
             <a:avLst/>
@@ -8155,13 +8439,13 @@
               </a:spcAft>
             </a:pPr>
             <a:r>
-              <a:rPr sz="1500">
+              <a:rPr sz="1400">
                 <a:solidFill>
                   <a:srgbClr val="E5E7EB"/>
                 </a:solidFill>
                 <a:latin typeface="Arial"/>
               </a:rPr>
-              <a:t>EU Extractive Waste Directive (2006/21/EC) requires waste-management plans, permits, closure plans, monitoring, and pollution prevention.</a:t>
+              <a:t>Add lime or limestone to raise pH and precipitate metals.</a:t>
             </a:r>
           </a:p>
           <a:p>
@@ -8171,13 +8455,13 @@
               </a:spcAft>
             </a:pPr>
             <a:r>
-              <a:rPr sz="1500">
+              <a:rPr sz="1400">
                 <a:solidFill>
                   <a:srgbClr val="E5E7EB"/>
                 </a:solidFill>
                 <a:latin typeface="Arial"/>
               </a:rPr>
-              <a:t>The Water Framework Directive adds protection against deterioration of receiving-water status.</a:t>
+              <a:t>Works for severe sites such as Iron Mountain.</a:t>
             </a:r>
           </a:p>
           <a:p>
@@ -8187,27 +8471,74 @@
               </a:spcAft>
             </a:pPr>
             <a:r>
-              <a:rPr sz="1500">
+              <a:rPr sz="1400">
                 <a:solidFill>
                   <a:srgbClr val="E5E7EB"/>
                 </a:solidFill>
                 <a:latin typeface="Arial"/>
               </a:rPr>
-              <a:t>Across jurisdictions, the trend is toward stronger closure planning, more monitoring, and clearer polluter-pays obligations.</a:t>
-            </a:r>
-          </a:p>
-        </p:txBody>
-      </p:sp>
-      <p:sp>
-        <p:nvSpPr>
-          <p:cNvPr id="11" name="TextBox 10"/>
-          <p:cNvSpPr txBox="1"/>
-          <p:nvPr/>
-        </p:nvSpPr>
-        <p:spPr>
-          <a:xfrm>
-            <a:off x="777240" y="5897880"/>
-            <a:ext cx="9144000" cy="228600"/>
+              <a:t>Reliable, but energy-, reagent-, and sludge-intensive.</a:t>
+            </a:r>
+          </a:p>
+        </p:txBody>
+      </p:sp>
+      <p:sp>
+        <p:nvSpPr>
+          <p:cNvPr id="11" name="Rounded Rectangle 10"/>
+          <p:cNvSpPr/>
+          <p:nvPr/>
+        </p:nvSpPr>
+        <p:spPr>
+          <a:xfrm>
+            <a:off x="8028431" y="1664208"/>
+            <a:ext cx="3520440" cy="2011680"/>
+          </a:xfrm>
+          <a:prstGeom prst="roundRect">
+            <a:avLst>
+              <a:gd name="adj" fmla="val 8000"/>
+            </a:avLst>
+          </a:prstGeom>
+          <a:solidFill>
+            <a:srgbClr val="111827"/>
+          </a:solidFill>
+          <a:ln w="12700">
+            <a:solidFill>
+              <a:srgbClr val="334155"/>
+            </a:solidFill>
+          </a:ln>
+        </p:spPr>
+        <p:style>
+          <a:lnRef idx="1">
+            <a:schemeClr val="accent1"/>
+          </a:lnRef>
+          <a:fillRef idx="3">
+            <a:schemeClr val="accent1"/>
+          </a:fillRef>
+          <a:effectRef idx="2">
+            <a:schemeClr val="accent1"/>
+          </a:effectRef>
+          <a:fontRef idx="minor">
+            <a:schemeClr val="lt1"/>
+          </a:fontRef>
+        </p:style>
+        <p:txBody>
+          <a:bodyPr rtlCol="0" anchor="ctr"/>
+          <a:lstStyle/>
+          <a:p>
+            <a:pPr algn="ctr"/>
+          </a:p>
+        </p:txBody>
+      </p:sp>
+      <p:sp>
+        <p:nvSpPr>
+          <p:cNvPr id="12" name="TextBox 11"/>
+          <p:cNvSpPr txBox="1"/>
+          <p:nvPr/>
+        </p:nvSpPr>
+        <p:spPr>
+          <a:xfrm>
+            <a:off x="8193023" y="1773936"/>
+            <a:ext cx="3191256" cy="274320"/>
           </a:xfrm>
           <a:prstGeom prst="rect">
             <a:avLst/>
@@ -8221,20 +8552,242 @@
           <a:lstStyle/>
           <a:p>
             <a:r>
-              <a:rPr sz="1000">
+              <a:rPr sz="1500" b="1">
+                <a:solidFill>
+                  <a:srgbClr val="FDBA74"/>
+                </a:solidFill>
+                <a:latin typeface="Arial"/>
+              </a:rPr>
+              <a:t>Passive and biological systems</a:t>
+            </a:r>
+          </a:p>
+        </p:txBody>
+      </p:sp>
+      <p:sp>
+        <p:nvSpPr>
+          <p:cNvPr id="13" name="TextBox 12"/>
+          <p:cNvSpPr txBox="1"/>
+          <p:nvPr/>
+        </p:nvSpPr>
+        <p:spPr>
+          <a:xfrm>
+            <a:off x="8211311" y="2103120"/>
+            <a:ext cx="3172968" cy="1463040"/>
+          </a:xfrm>
+          <a:prstGeom prst="rect">
+            <a:avLst/>
+          </a:prstGeom>
+          <a:noFill/>
+        </p:spPr>
+        <p:txBody>
+          <a:bodyPr wrap="square">
+            <a:noAutofit/>
+          </a:bodyPr>
+          <a:lstStyle/>
+          <a:p>
+            <a:pPr>
+              <a:spcAft>
+                <a:spcPts val="600"/>
+              </a:spcAft>
+            </a:pPr>
+            <a:r>
+              <a:rPr sz="1400">
+                <a:solidFill>
+                  <a:srgbClr val="E5E7EB"/>
+                </a:solidFill>
+                <a:latin typeface="Arial"/>
+              </a:rPr>
+              <a:t>Examples: anoxic limestone drains, open channels, wetlands, vertical flow ponds.</a:t>
+            </a:r>
+          </a:p>
+          <a:p>
+            <a:pPr>
+              <a:spcAft>
+                <a:spcPts val="600"/>
+              </a:spcAft>
+            </a:pPr>
+            <a:r>
+              <a:rPr sz="1400">
+                <a:solidFill>
+                  <a:srgbClr val="E5E7EB"/>
+                </a:solidFill>
+                <a:latin typeface="Arial"/>
+              </a:rPr>
+              <a:t>Sulfate-reducing bacteria can remove sulfate and metals while generating alkalinity.</a:t>
+            </a:r>
+          </a:p>
+          <a:p>
+            <a:pPr>
+              <a:spcAft>
+                <a:spcPts val="600"/>
+              </a:spcAft>
+            </a:pPr>
+            <a:r>
+              <a:rPr sz="1400">
+                <a:solidFill>
+                  <a:srgbClr val="E5E7EB"/>
+                </a:solidFill>
+                <a:latin typeface="Arial"/>
+              </a:rPr>
+              <a:t>Best for suitable chemistry, flow, climate, and land area.</a:t>
+            </a:r>
+          </a:p>
+        </p:txBody>
+      </p:sp>
+      <p:sp>
+        <p:nvSpPr>
+          <p:cNvPr id="14" name="Rounded Rectangle 13"/>
+          <p:cNvSpPr/>
+          <p:nvPr/>
+        </p:nvSpPr>
+        <p:spPr>
+          <a:xfrm>
+            <a:off x="1280160" y="3977639"/>
+            <a:ext cx="9601200" cy="1737360"/>
+          </a:xfrm>
+          <a:prstGeom prst="roundRect">
+            <a:avLst>
+              <a:gd name="adj" fmla="val 8000"/>
+            </a:avLst>
+          </a:prstGeom>
+          <a:solidFill>
+            <a:srgbClr val="111827"/>
+          </a:solidFill>
+          <a:ln w="12700">
+            <a:solidFill>
+              <a:srgbClr val="334155"/>
+            </a:solidFill>
+          </a:ln>
+        </p:spPr>
+        <p:style>
+          <a:lnRef idx="1">
+            <a:schemeClr val="accent1"/>
+          </a:lnRef>
+          <a:fillRef idx="3">
+            <a:schemeClr val="accent1"/>
+          </a:fillRef>
+          <a:effectRef idx="2">
+            <a:schemeClr val="accent1"/>
+          </a:effectRef>
+          <a:fontRef idx="minor">
+            <a:schemeClr val="lt1"/>
+          </a:fontRef>
+        </p:style>
+        <p:txBody>
+          <a:bodyPr rtlCol="0" anchor="ctr"/>
+          <a:lstStyle/>
+          <a:p>
+            <a:pPr algn="ctr"/>
+          </a:p>
+        </p:txBody>
+      </p:sp>
+      <p:sp>
+        <p:nvSpPr>
+          <p:cNvPr id="15" name="TextBox 14"/>
+          <p:cNvSpPr txBox="1"/>
+          <p:nvPr/>
+        </p:nvSpPr>
+        <p:spPr>
+          <a:xfrm>
+            <a:off x="1444752" y="4087367"/>
+            <a:ext cx="9272016" cy="274320"/>
+          </a:xfrm>
+          <a:prstGeom prst="rect">
+            <a:avLst/>
+          </a:prstGeom>
+          <a:noFill/>
+        </p:spPr>
+        <p:txBody>
+          <a:bodyPr wrap="none">
+            <a:spAutoFit/>
+          </a:bodyPr>
+          <a:lstStyle/>
+          <a:p>
+            <a:r>
+              <a:rPr sz="1500" b="1">
+                <a:solidFill>
+                  <a:srgbClr val="FDBA74"/>
+                </a:solidFill>
+                <a:latin typeface="Arial"/>
+              </a:rPr>
+              <a:t>Bottom line</a:t>
+            </a:r>
+          </a:p>
+        </p:txBody>
+      </p:sp>
+      <p:sp>
+        <p:nvSpPr>
+          <p:cNvPr id="16" name="TextBox 15"/>
+          <p:cNvSpPr txBox="1"/>
+          <p:nvPr/>
+        </p:nvSpPr>
+        <p:spPr>
+          <a:xfrm>
+            <a:off x="1572768" y="4434840"/>
+            <a:ext cx="9052560" cy="822960"/>
+          </a:xfrm>
+          <a:prstGeom prst="rect">
+            <a:avLst/>
+          </a:prstGeom>
+          <a:noFill/>
+        </p:spPr>
+        <p:txBody>
+          <a:bodyPr wrap="square">
+            <a:spAutoFit/>
+          </a:bodyPr>
+          <a:lstStyle/>
+          <a:p>
+            <a:pPr algn="ctr"/>
+            <a:r>
+              <a:rPr sz="1800" b="1">
+                <a:solidFill>
+                  <a:srgbClr val="FFFFFF"/>
+                </a:solidFill>
+                <a:latin typeface="Arial"/>
+              </a:rPr>
+              <a:t>No single technology works everywhere. The strongest engineering strategy combines prediction, source control, and the right treatment system for site chemistry and flow.</a:t>
+            </a:r>
+          </a:p>
+        </p:txBody>
+      </p:sp>
+      <p:sp>
+        <p:nvSpPr>
+          <p:cNvPr id="17" name="TextBox 16"/>
+          <p:cNvSpPr txBox="1"/>
+          <p:nvPr/>
+        </p:nvSpPr>
+        <p:spPr>
+          <a:xfrm>
+            <a:off x="777240" y="5897880"/>
+            <a:ext cx="10241280" cy="256032"/>
+          </a:xfrm>
+          <a:prstGeom prst="rect">
+            <a:avLst/>
+          </a:prstGeom>
+          <a:noFill/>
+        </p:spPr>
+        <p:txBody>
+          <a:bodyPr wrap="square">
+            <a:spAutoFit/>
+          </a:bodyPr>
+          <a:lstStyle/>
+          <a:p>
+            <a:pPr algn="l"/>
+            <a:r>
+              <a:rPr sz="1000" b="0">
                 <a:solidFill>
                   <a:srgbClr val="94A3B8"/>
                 </a:solidFill>
                 <a:latin typeface="Arial"/>
               </a:rPr>
-              <a:t>Sources: EPA Coal Mining Effluent Guidelines; eCFR 40 CFR Part 434 and 30 CFR Part 876; EU mining-waste overview.</a:t>
-            </a:r>
-          </a:p>
-        </p:txBody>
-      </p:sp>
-      <p:sp>
-        <p:nvSpPr>
-          <p:cNvPr id="12" name="TextBox 11"/>
+              <a:t>Sources: Johnson and Hallberg (2005); Skousen et al. (2017); Rambabu et al. (2020); U.S. EPA AMD overview.</a:t>
+            </a:r>
+          </a:p>
+        </p:txBody>
+      </p:sp>
+      <p:sp>
+        <p:nvSpPr>
+          <p:cNvPr id="18" name="TextBox 17"/>
           <p:cNvSpPr txBox="1"/>
           <p:nvPr/>
         </p:nvSpPr>
@@ -8262,7 +8815,7 @@
                 </a:solidFill>
                 <a:latin typeface="Arial"/>
               </a:rPr>
-              <a:t>AMD draft deck | Slide 7</a:t>
+              <a:t>Group 7 | AMD presentation | Slide 7</a:t>
             </a:r>
           </a:p>
         </p:txBody>
@@ -8302,7 +8855,7 @@
         <p:spPr>
           <a:xfrm>
             <a:off x="548640" y="320040"/>
-            <a:ext cx="3657600" cy="274320"/>
+            <a:ext cx="4754880" cy="274320"/>
           </a:xfrm>
           <a:prstGeom prst="rect">
             <a:avLst/>
@@ -8322,7 +8875,7 @@
                 </a:solidFill>
                 <a:latin typeface="Arial"/>
               </a:rPr>
-              <a:t>CASE STUDY</a:t>
+              <a:t>ECONOMICS</a:t>
             </a:r>
           </a:p>
         </p:txBody>
@@ -8336,7 +8889,7 @@
         <p:spPr>
           <a:xfrm>
             <a:off x="548640" y="594360"/>
-            <a:ext cx="10607040" cy="640080"/>
+            <a:ext cx="10789920" cy="685800"/>
           </a:xfrm>
           <a:prstGeom prst="rect">
             <a:avLst/>
@@ -8356,7 +8909,7 @@
                 </a:solidFill>
                 <a:latin typeface="Arial"/>
               </a:rPr>
-              <a:t>Summitville Mine, Colorado</a:t>
+              <a:t>Economics: why AMD becomes a long-tail liability</a:t>
             </a:r>
           </a:p>
         </p:txBody>
@@ -8370,7 +8923,7 @@
         <p:spPr>
           <a:xfrm>
             <a:off x="548640" y="1298448"/>
-            <a:ext cx="2011680" cy="73152"/>
+            <a:ext cx="2377440" cy="73152"/>
           </a:xfrm>
           <a:prstGeom prst="rect">
             <a:avLst/>
@@ -8412,8 +8965,8 @@
         </p:nvSpPr>
         <p:spPr>
           <a:xfrm>
-            <a:off x="685800" y="1691640"/>
-            <a:ext cx="2971800" cy="4526280"/>
+            <a:off x="749808" y="1682496"/>
+            <a:ext cx="3063240" cy="1325880"/>
           </a:xfrm>
           <a:prstGeom prst="roundRect">
             <a:avLst>
@@ -8459,28 +9012,29 @@
         </p:nvSpPr>
         <p:spPr>
           <a:xfrm>
-            <a:off x="850392" y="1801368"/>
-            <a:ext cx="2642616" cy="274320"/>
-          </a:xfrm>
-          <a:prstGeom prst="rect">
-            <a:avLst/>
-          </a:prstGeom>
-          <a:noFill/>
-        </p:spPr>
-        <p:txBody>
-          <a:bodyPr wrap="none">
+            <a:off x="896112" y="1810512"/>
+            <a:ext cx="2770632" cy="411480"/>
+          </a:xfrm>
+          <a:prstGeom prst="rect">
+            <a:avLst/>
+          </a:prstGeom>
+          <a:noFill/>
+        </p:spPr>
+        <p:txBody>
+          <a:bodyPr wrap="square">
             <a:spAutoFit/>
           </a:bodyPr>
           <a:lstStyle/>
           <a:p>
-            <a:r>
-              <a:rPr sz="1500" b="1">
-                <a:solidFill>
-                  <a:srgbClr val="FDBA74"/>
-                </a:solidFill>
-                <a:latin typeface="Arial"/>
-              </a:rPr>
-              <a:t>Problem</a:t>
+            <a:pPr algn="l"/>
+            <a:r>
+              <a:rPr sz="2400" b="1">
+                <a:solidFill>
+                  <a:srgbClr val="FFFFFF"/>
+                </a:solidFill>
+                <a:latin typeface="Arial"/>
+              </a:rPr>
+              <a:t>1,543 km</a:t>
             </a:r>
           </a:p>
         </p:txBody>
@@ -8493,8 +9047,8 @@
         </p:nvSpPr>
         <p:spPr>
           <a:xfrm>
-            <a:off x="850392" y="2130552"/>
-            <a:ext cx="2642616" cy="3886200"/>
+            <a:off x="896112" y="2322576"/>
+            <a:ext cx="2770632" cy="576072"/>
           </a:xfrm>
           <a:prstGeom prst="rect">
             <a:avLst/>
@@ -8503,39 +9057,19 @@
         </p:spPr>
         <p:txBody>
           <a:bodyPr wrap="square">
-            <a:noAutofit/>
-          </a:bodyPr>
-          <a:lstStyle/>
-          <a:p>
-            <a:pPr>
-              <a:spcAft>
-                <a:spcPts val="600"/>
-              </a:spcAft>
-            </a:pPr>
-            <a:r>
-              <a:rPr sz="1500">
-                <a:solidFill>
-                  <a:srgbClr val="E5E7EB"/>
-                </a:solidFill>
-                <a:latin typeface="Arial"/>
-              </a:rPr>
-              <a:t>Open-pit gold mining and heap leaching increased AMD generation in a sulfide-rich setting.</a:t>
-            </a:r>
-          </a:p>
-          <a:p>
-            <a:pPr>
-              <a:spcAft>
-                <a:spcPts val="600"/>
-              </a:spcAft>
-            </a:pPr>
-            <a:r>
-              <a:rPr sz="1500">
-                <a:solidFill>
-                  <a:srgbClr val="E5E7EB"/>
-                </a:solidFill>
-                <a:latin typeface="Arial"/>
-              </a:rPr>
-              <a:t>Acidic, metal-laden drainage damaged aquatic life for more than 20 miles downstream.</a:t>
+            <a:spAutoFit/>
+          </a:bodyPr>
+          <a:lstStyle/>
+          <a:p>
+            <a:pPr algn="l"/>
+            <a:r>
+              <a:rPr sz="1200" b="0">
+                <a:solidFill>
+                  <a:srgbClr val="94A3B8"/>
+                </a:solidFill>
+                <a:latin typeface="Arial"/>
+              </a:rPr>
+              <a:t>Stream length protected by the Pennsylvania treatment systems evaluated by Black and Weber.</a:t>
             </a:r>
           </a:p>
         </p:txBody>
@@ -8548,8 +9082,8 @@
         </p:nvSpPr>
         <p:spPr>
           <a:xfrm>
-            <a:off x="4023360" y="1691640"/>
-            <a:ext cx="2971800" cy="4526280"/>
+            <a:off x="4151376" y="1682496"/>
+            <a:ext cx="3063240" cy="1325880"/>
           </a:xfrm>
           <a:prstGeom prst="roundRect">
             <a:avLst>
@@ -8595,28 +9129,29 @@
         </p:nvSpPr>
         <p:spPr>
           <a:xfrm>
-            <a:off x="4187952" y="1801368"/>
-            <a:ext cx="2642616" cy="274320"/>
-          </a:xfrm>
-          <a:prstGeom prst="rect">
-            <a:avLst/>
-          </a:prstGeom>
-          <a:noFill/>
-        </p:spPr>
-        <p:txBody>
-          <a:bodyPr wrap="none">
+            <a:off x="4297680" y="1810512"/>
+            <a:ext cx="2770632" cy="411480"/>
+          </a:xfrm>
+          <a:prstGeom prst="rect">
+            <a:avLst/>
+          </a:prstGeom>
+          <a:noFill/>
+        </p:spPr>
+        <p:txBody>
+          <a:bodyPr wrap="square">
             <a:spAutoFit/>
           </a:bodyPr>
           <a:lstStyle/>
           <a:p>
-            <a:r>
-              <a:rPr sz="1500" b="1">
-                <a:solidFill>
-                  <a:srgbClr val="FDBA74"/>
-                </a:solidFill>
-                <a:latin typeface="Arial"/>
-              </a:rPr>
-              <a:t>Response</a:t>
+            <a:pPr algn="l"/>
+            <a:r>
+              <a:rPr sz="2400" b="1">
+                <a:solidFill>
+                  <a:srgbClr val="FFFFFF"/>
+                </a:solidFill>
+                <a:latin typeface="Arial"/>
+              </a:rPr>
+              <a:t>$5,720 / km / year</a:t>
             </a:r>
           </a:p>
         </p:txBody>
@@ -8629,8 +9164,8 @@
         </p:nvSpPr>
         <p:spPr>
           <a:xfrm>
-            <a:off x="4187952" y="2130552"/>
-            <a:ext cx="2642616" cy="3886200"/>
+            <a:off x="4297680" y="2322576"/>
+            <a:ext cx="2770632" cy="576072"/>
           </a:xfrm>
           <a:prstGeom prst="rect">
             <a:avLst/>
@@ -8639,39 +9174,19 @@
         </p:spPr>
         <p:txBody>
           <a:bodyPr wrap="square">
-            <a:noAutofit/>
-          </a:bodyPr>
-          <a:lstStyle/>
-          <a:p>
-            <a:pPr>
-              <a:spcAft>
-                <a:spcPts val="600"/>
-              </a:spcAft>
-            </a:pPr>
-            <a:r>
-              <a:rPr sz="1500">
-                <a:solidFill>
-                  <a:srgbClr val="E5E7EB"/>
-                </a:solidFill>
-                <a:latin typeface="Arial"/>
-              </a:rPr>
-              <a:t>EPA took over operations after bankruptcy and focused on both water treatment and source control.</a:t>
-            </a:r>
-          </a:p>
-          <a:p>
-            <a:pPr>
-              <a:spcAft>
-                <a:spcPts val="600"/>
-              </a:spcAft>
-            </a:pPr>
-            <a:r>
-              <a:rPr sz="1500">
-                <a:solidFill>
-                  <a:srgbClr val="E5E7EB"/>
-                </a:solidFill>
-                <a:latin typeface="Arial"/>
-              </a:rPr>
-              <a:t>Major acid-generating wastes were moved into lined, capped repositories.</a:t>
+            <a:spAutoFit/>
+          </a:bodyPr>
+          <a:lstStyle/>
+          <a:p>
+            <a:pPr algn="l"/>
+            <a:r>
+              <a:rPr sz="1200" b="0">
+                <a:solidFill>
+                  <a:srgbClr val="94A3B8"/>
+                </a:solidFill>
+                <a:latin typeface="Arial"/>
+              </a:rPr>
+              <a:t>Present-value lifetime treatment cost implied by that analysis.</a:t>
             </a:r>
           </a:p>
         </p:txBody>
@@ -8684,8 +9199,8 @@
         </p:nvSpPr>
         <p:spPr>
           <a:xfrm>
-            <a:off x="7360920" y="1691640"/>
-            <a:ext cx="2971800" cy="4526280"/>
+            <a:off x="7552944" y="1682496"/>
+            <a:ext cx="3063240" cy="1325880"/>
           </a:xfrm>
           <a:prstGeom prst="roundRect">
             <a:avLst>
@@ -8731,8 +9246,125 @@
         </p:nvSpPr>
         <p:spPr>
           <a:xfrm>
-            <a:off x="7525512" y="1801368"/>
-            <a:ext cx="2642616" cy="274320"/>
+            <a:off x="7699248" y="1810512"/>
+            <a:ext cx="2770632" cy="411480"/>
+          </a:xfrm>
+          <a:prstGeom prst="rect">
+            <a:avLst/>
+          </a:prstGeom>
+          <a:noFill/>
+        </p:spPr>
+        <p:txBody>
+          <a:bodyPr wrap="square">
+            <a:spAutoFit/>
+          </a:bodyPr>
+          <a:lstStyle/>
+          <a:p>
+            <a:pPr algn="l"/>
+            <a:r>
+              <a:rPr sz="2400" b="1">
+                <a:solidFill>
+                  <a:srgbClr val="FFFFFF"/>
+                </a:solidFill>
+                <a:latin typeface="Arial"/>
+              </a:rPr>
+              <a:t>AMDTreat</a:t>
+            </a:r>
+          </a:p>
+        </p:txBody>
+      </p:sp>
+      <p:sp>
+        <p:nvSpPr>
+          <p:cNvPr id="13" name="TextBox 12"/>
+          <p:cNvSpPr txBox="1"/>
+          <p:nvPr/>
+        </p:nvSpPr>
+        <p:spPr>
+          <a:xfrm>
+            <a:off x="7699248" y="2322576"/>
+            <a:ext cx="2770632" cy="576072"/>
+          </a:xfrm>
+          <a:prstGeom prst="rect">
+            <a:avLst/>
+          </a:prstGeom>
+          <a:noFill/>
+        </p:spPr>
+        <p:txBody>
+          <a:bodyPr wrap="square">
+            <a:spAutoFit/>
+          </a:bodyPr>
+          <a:lstStyle/>
+          <a:p>
+            <a:pPr algn="l"/>
+            <a:r>
+              <a:rPr sz="1200" b="0">
+                <a:solidFill>
+                  <a:srgbClr val="94A3B8"/>
+                </a:solidFill>
+                <a:latin typeface="Arial"/>
+              </a:rPr>
+              <a:t>OSMRE cost-estimation tool used for mine-drainage abatement planning.</a:t>
+            </a:r>
+          </a:p>
+        </p:txBody>
+      </p:sp>
+      <p:sp>
+        <p:nvSpPr>
+          <p:cNvPr id="14" name="Rounded Rectangle 13"/>
+          <p:cNvSpPr/>
+          <p:nvPr/>
+        </p:nvSpPr>
+        <p:spPr>
+          <a:xfrm>
+            <a:off x="749808" y="3383280"/>
+            <a:ext cx="5257800" cy="2514600"/>
+          </a:xfrm>
+          <a:prstGeom prst="roundRect">
+            <a:avLst>
+              <a:gd name="adj" fmla="val 8000"/>
+            </a:avLst>
+          </a:prstGeom>
+          <a:solidFill>
+            <a:srgbClr val="111827"/>
+          </a:solidFill>
+          <a:ln w="12700">
+            <a:solidFill>
+              <a:srgbClr val="334155"/>
+            </a:solidFill>
+          </a:ln>
+        </p:spPr>
+        <p:style>
+          <a:lnRef idx="1">
+            <a:schemeClr val="accent1"/>
+          </a:lnRef>
+          <a:fillRef idx="3">
+            <a:schemeClr val="accent1"/>
+          </a:fillRef>
+          <a:effectRef idx="2">
+            <a:schemeClr val="accent1"/>
+          </a:effectRef>
+          <a:fontRef idx="minor">
+            <a:schemeClr val="lt1"/>
+          </a:fontRef>
+        </p:style>
+        <p:txBody>
+          <a:bodyPr rtlCol="0" anchor="ctr"/>
+          <a:lstStyle/>
+          <a:p>
+            <a:pPr algn="ctr"/>
+          </a:p>
+        </p:txBody>
+      </p:sp>
+      <p:sp>
+        <p:nvSpPr>
+          <p:cNvPr id="15" name="TextBox 14"/>
+          <p:cNvSpPr txBox="1"/>
+          <p:nvPr/>
+        </p:nvSpPr>
+        <p:spPr>
+          <a:xfrm>
+            <a:off x="914400" y="3493008"/>
+            <a:ext cx="4928616" cy="274320"/>
           </a:xfrm>
           <a:prstGeom prst="rect">
             <a:avLst/>
@@ -8752,21 +9384,21 @@
                 </a:solidFill>
                 <a:latin typeface="Arial"/>
               </a:rPr>
-              <a:t>Lesson</a:t>
-            </a:r>
-          </a:p>
-        </p:txBody>
-      </p:sp>
-      <p:sp>
-        <p:nvSpPr>
-          <p:cNvPr id="13" name="TextBox 12"/>
-          <p:cNvSpPr txBox="1"/>
-          <p:nvPr/>
-        </p:nvSpPr>
-        <p:spPr>
-          <a:xfrm>
-            <a:off x="7525512" y="2130552"/>
-            <a:ext cx="2642616" cy="3886200"/>
+              <a:t>Economic problem</a:t>
+            </a:r>
+          </a:p>
+        </p:txBody>
+      </p:sp>
+      <p:sp>
+        <p:nvSpPr>
+          <p:cNvPr id="16" name="TextBox 15"/>
+          <p:cNvSpPr txBox="1"/>
+          <p:nvPr/>
+        </p:nvSpPr>
+        <p:spPr>
+          <a:xfrm>
+            <a:off x="969264" y="3794760"/>
+            <a:ext cx="4800600" cy="1783080"/>
           </a:xfrm>
           <a:prstGeom prst="rect">
             <a:avLst/>
@@ -8785,13 +9417,13 @@
               </a:spcAft>
             </a:pPr>
             <a:r>
-              <a:rPr sz="1500">
+              <a:rPr sz="1600">
                 <a:solidFill>
                   <a:srgbClr val="E5E7EB"/>
                 </a:solidFill>
                 <a:latin typeface="Arial"/>
               </a:rPr>
-              <a:t>Reported treatment cost was about $50,000 per day during response planning.</a:t>
+              <a:t>Treatment often continues long after revenue from the mine has ended.</a:t>
             </a:r>
           </a:p>
           <a:p>
@@ -8801,27 +9433,90 @@
               </a:spcAft>
             </a:pPr>
             <a:r>
-              <a:rPr sz="1500">
+              <a:rPr sz="1600">
                 <a:solidFill>
                   <a:srgbClr val="E5E7EB"/>
                 </a:solidFill>
                 <a:latin typeface="Arial"/>
               </a:rPr>
-              <a:t>Poor AMD control can become a long-term public finance and regulatory problem.</a:t>
-            </a:r>
-          </a:p>
-        </p:txBody>
-      </p:sp>
-      <p:sp>
-        <p:nvSpPr>
-          <p:cNvPr id="14" name="TextBox 13"/>
-          <p:cNvSpPr txBox="1"/>
-          <p:nvPr/>
-        </p:nvSpPr>
-        <p:spPr>
-          <a:xfrm>
-            <a:off x="777240" y="5897880"/>
-            <a:ext cx="9144000" cy="228600"/>
+              <a:t>Costs include reagents, sludge disposal, monitoring, inspections, and plant operations.</a:t>
+            </a:r>
+          </a:p>
+          <a:p>
+            <a:pPr>
+              <a:spcAft>
+                <a:spcPts val="600"/>
+              </a:spcAft>
+            </a:pPr>
+            <a:r>
+              <a:rPr sz="1600">
+                <a:solidFill>
+                  <a:srgbClr val="E5E7EB"/>
+                </a:solidFill>
+                <a:latin typeface="Arial"/>
+              </a:rPr>
+              <a:t>If not internalized early, cleanup costs shift from private operators to the public.</a:t>
+            </a:r>
+          </a:p>
+        </p:txBody>
+      </p:sp>
+      <p:sp>
+        <p:nvSpPr>
+          <p:cNvPr id="17" name="Rounded Rectangle 16"/>
+          <p:cNvSpPr/>
+          <p:nvPr/>
+        </p:nvSpPr>
+        <p:spPr>
+          <a:xfrm>
+            <a:off x="6263640" y="3383280"/>
+            <a:ext cx="4983480" cy="2514600"/>
+          </a:xfrm>
+          <a:prstGeom prst="roundRect">
+            <a:avLst>
+              <a:gd name="adj" fmla="val 8000"/>
+            </a:avLst>
+          </a:prstGeom>
+          <a:solidFill>
+            <a:srgbClr val="111827"/>
+          </a:solidFill>
+          <a:ln w="12700">
+            <a:solidFill>
+              <a:srgbClr val="334155"/>
+            </a:solidFill>
+          </a:ln>
+        </p:spPr>
+        <p:style>
+          <a:lnRef idx="1">
+            <a:schemeClr val="accent1"/>
+          </a:lnRef>
+          <a:fillRef idx="3">
+            <a:schemeClr val="accent1"/>
+          </a:fillRef>
+          <a:effectRef idx="2">
+            <a:schemeClr val="accent1"/>
+          </a:effectRef>
+          <a:fontRef idx="minor">
+            <a:schemeClr val="lt1"/>
+          </a:fontRef>
+        </p:style>
+        <p:txBody>
+          <a:bodyPr rtlCol="0" anchor="ctr"/>
+          <a:lstStyle/>
+          <a:p>
+            <a:pPr algn="ctr"/>
+          </a:p>
+        </p:txBody>
+      </p:sp>
+      <p:sp>
+        <p:nvSpPr>
+          <p:cNvPr id="18" name="TextBox 17"/>
+          <p:cNvSpPr txBox="1"/>
+          <p:nvPr/>
+        </p:nvSpPr>
+        <p:spPr>
+          <a:xfrm>
+            <a:off x="6428232" y="3493008"/>
+            <a:ext cx="4654296" cy="274320"/>
           </a:xfrm>
           <a:prstGeom prst="rect">
             <a:avLst/>
@@ -8835,20 +9530,126 @@
           <a:lstStyle/>
           <a:p>
             <a:r>
-              <a:rPr sz="1000">
+              <a:rPr sz="1500" b="1">
+                <a:solidFill>
+                  <a:srgbClr val="FDBA74"/>
+                </a:solidFill>
+                <a:latin typeface="Arial"/>
+              </a:rPr>
+              <a:t>Economic lesson</a:t>
+            </a:r>
+          </a:p>
+        </p:txBody>
+      </p:sp>
+      <p:sp>
+        <p:nvSpPr>
+          <p:cNvPr id="19" name="TextBox 18"/>
+          <p:cNvSpPr txBox="1"/>
+          <p:nvPr/>
+        </p:nvSpPr>
+        <p:spPr>
+          <a:xfrm>
+            <a:off x="6492240" y="3794760"/>
+            <a:ext cx="4526280" cy="1783080"/>
+          </a:xfrm>
+          <a:prstGeom prst="rect">
+            <a:avLst/>
+          </a:prstGeom>
+          <a:noFill/>
+        </p:spPr>
+        <p:txBody>
+          <a:bodyPr wrap="square">
+            <a:noAutofit/>
+          </a:bodyPr>
+          <a:lstStyle/>
+          <a:p>
+            <a:pPr>
+              <a:spcAft>
+                <a:spcPts val="600"/>
+              </a:spcAft>
+            </a:pPr>
+            <a:r>
+              <a:rPr sz="1600">
+                <a:solidFill>
+                  <a:srgbClr val="E5E7EB"/>
+                </a:solidFill>
+                <a:latin typeface="Arial"/>
+              </a:rPr>
+              <a:t>Treatment can still be cost-effective because stream restoration benefits are large.</a:t>
+            </a:r>
+          </a:p>
+          <a:p>
+            <a:pPr>
+              <a:spcAft>
+                <a:spcPts val="600"/>
+              </a:spcAft>
+            </a:pPr>
+            <a:r>
+              <a:rPr sz="1600">
+                <a:solidFill>
+                  <a:srgbClr val="E5E7EB"/>
+                </a:solidFill>
+                <a:latin typeface="Arial"/>
+              </a:rPr>
+              <a:t>But prevention and early reclamation are usually more rational than decades of cleanup.</a:t>
+            </a:r>
+          </a:p>
+          <a:p>
+            <a:pPr>
+              <a:spcAft>
+                <a:spcPts val="600"/>
+              </a:spcAft>
+            </a:pPr>
+            <a:r>
+              <a:rPr sz="1600">
+                <a:solidFill>
+                  <a:srgbClr val="E5E7EB"/>
+                </a:solidFill>
+                <a:latin typeface="Arial"/>
+              </a:rPr>
+              <a:t>AMD is therefore an environmental issue and a financial-assurance issue.</a:t>
+            </a:r>
+          </a:p>
+        </p:txBody>
+      </p:sp>
+      <p:sp>
+        <p:nvSpPr>
+          <p:cNvPr id="20" name="TextBox 19"/>
+          <p:cNvSpPr txBox="1"/>
+          <p:nvPr/>
+        </p:nvSpPr>
+        <p:spPr>
+          <a:xfrm>
+            <a:off x="777240" y="5897880"/>
+            <a:ext cx="10241280" cy="256032"/>
+          </a:xfrm>
+          <a:prstGeom prst="rect">
+            <a:avLst/>
+          </a:prstGeom>
+          <a:noFill/>
+        </p:spPr>
+        <p:txBody>
+          <a:bodyPr wrap="square">
+            <a:spAutoFit/>
+          </a:bodyPr>
+          <a:lstStyle/>
+          <a:p>
+            <a:pPr algn="l"/>
+            <a:r>
+              <a:rPr sz="1000" b="0">
                 <a:solidFill>
                   <a:srgbClr val="94A3B8"/>
                 </a:solidFill>
                 <a:latin typeface="Arial"/>
               </a:rPr>
-              <a:t>Sources: Summitville technical papers and reclamation case documentation.</a:t>
-            </a:r>
-          </a:p>
-        </p:txBody>
-      </p:sp>
-      <p:sp>
-        <p:nvSpPr>
-          <p:cNvPr id="15" name="TextBox 14"/>
+              <a:t>Sources: Black and Weber (2024); Johnson and Hallberg (2005); OSMRE AMDTreat resources; U.S. EPA AMD overview.</a:t>
+            </a:r>
+          </a:p>
+        </p:txBody>
+      </p:sp>
+      <p:sp>
+        <p:nvSpPr>
+          <p:cNvPr id="21" name="TextBox 20"/>
           <p:cNvSpPr txBox="1"/>
           <p:nvPr/>
         </p:nvSpPr>
@@ -8876,7 +9677,7 @@
                 </a:solidFill>
                 <a:latin typeface="Arial"/>
               </a:rPr>
-              <a:t>AMD draft deck | Slide 8</a:t>
+              <a:t>Group 7 | AMD presentation | Slide 8</a:t>
             </a:r>
           </a:p>
         </p:txBody>
@@ -8916,7 +9717,7 @@
         <p:spPr>
           <a:xfrm>
             <a:off x="548640" y="320040"/>
-            <a:ext cx="3657600" cy="274320"/>
+            <a:ext cx="4754880" cy="274320"/>
           </a:xfrm>
           <a:prstGeom prst="rect">
             <a:avLst/>
@@ -8936,7 +9737,7 @@
                 </a:solidFill>
                 <a:latin typeface="Arial"/>
               </a:rPr>
-              <a:t>CASE STUDY</a:t>
+              <a:t>POLICY</a:t>
             </a:r>
           </a:p>
         </p:txBody>
@@ -8950,7 +9751,7 @@
         <p:spPr>
           <a:xfrm>
             <a:off x="548640" y="594360"/>
-            <a:ext cx="10607040" cy="640080"/>
+            <a:ext cx="10789920" cy="685800"/>
           </a:xfrm>
           <a:prstGeom prst="rect">
             <a:avLst/>
@@ -8970,7 +9771,7 @@
                 </a:solidFill>
                 <a:latin typeface="Arial"/>
               </a:rPr>
-              <a:t>Wheal Jane, Cornwall</a:t>
+              <a:t>Laws and regulation</a:t>
             </a:r>
           </a:p>
         </p:txBody>
@@ -8984,7 +9785,7 @@
         <p:spPr>
           <a:xfrm>
             <a:off x="548640" y="1298448"/>
-            <a:ext cx="2011680" cy="73152"/>
+            <a:ext cx="2377440" cy="73152"/>
           </a:xfrm>
           <a:prstGeom prst="rect">
             <a:avLst/>
@@ -9026,8 +9827,8 @@
         </p:nvSpPr>
         <p:spPr>
           <a:xfrm>
-            <a:off x="685800" y="1691640"/>
-            <a:ext cx="2971800" cy="4526280"/>
+            <a:off x="685800" y="1664208"/>
+            <a:ext cx="5394960" cy="4480560"/>
           </a:xfrm>
           <a:prstGeom prst="roundRect">
             <a:avLst>
@@ -9073,8 +9874,8 @@
         </p:nvSpPr>
         <p:spPr>
           <a:xfrm>
-            <a:off x="850392" y="1801368"/>
-            <a:ext cx="2642616" cy="274320"/>
+            <a:off x="850392" y="1773936"/>
+            <a:ext cx="5065776" cy="274320"/>
           </a:xfrm>
           <a:prstGeom prst="rect">
             <a:avLst/>
@@ -9094,7 +9895,7 @@
                 </a:solidFill>
                 <a:latin typeface="Arial"/>
               </a:rPr>
-              <a:t>Problem</a:t>
+              <a:t>Core legal framework</a:t>
             </a:r>
           </a:p>
         </p:txBody>
@@ -9107,8 +9908,8 @@
         </p:nvSpPr>
         <p:spPr>
           <a:xfrm>
-            <a:off x="850392" y="2130552"/>
-            <a:ext cx="2642616" cy="3886200"/>
+            <a:off x="914400" y="2103120"/>
+            <a:ext cx="4937760" cy="3611880"/>
           </a:xfrm>
           <a:prstGeom prst="rect">
             <a:avLst/>
@@ -9133,7 +9934,7 @@
                 </a:solidFill>
                 <a:latin typeface="Arial"/>
               </a:rPr>
-              <a:t>Mine closure and rebound of mine water led to a highly visible acidic discharge into the Carnon River system.</a:t>
+              <a:t>Under the Clean Water Act, point-source discharges to waters of the United States generally need NPDES permits.</a:t>
             </a:r>
           </a:p>
           <a:p>
@@ -9149,7 +9950,39 @@
                 </a:solidFill>
                 <a:latin typeface="Arial"/>
               </a:rPr>
-              <a:t>The site became a flagship AMD remediation case in the UK.</a:t>
+              <a:t>EPA says permits are issued by EPA or authorized states and usually run no more than five years before renewal.</a:t>
+            </a:r>
+          </a:p>
+          <a:p>
+            <a:pPr>
+              <a:spcAft>
+                <a:spcPts val="600"/>
+              </a:spcAft>
+            </a:pPr>
+            <a:r>
+              <a:rPr sz="1500">
+                <a:solidFill>
+                  <a:srgbClr val="E5E7EB"/>
+                </a:solidFill>
+                <a:latin typeface="Arial"/>
+              </a:rPr>
+              <a:t>SMCRA is the main federal law for environmental effects of coal mining, with states often acting as the primary regulator after primacy approval.</a:t>
+            </a:r>
+          </a:p>
+          <a:p>
+            <a:pPr>
+              <a:spcAft>
+                <a:spcPts val="600"/>
+              </a:spcAft>
+            </a:pPr>
+            <a:r>
+              <a:rPr sz="1500">
+                <a:solidFill>
+                  <a:srgbClr val="E5E7EB"/>
+                </a:solidFill>
+                <a:latin typeface="Arial"/>
+              </a:rPr>
+              <a:t>Legacy hardrock sites such as Iron Mountain may also involve CERCLA / Superfund and state water boards.</a:t>
             </a:r>
           </a:p>
         </p:txBody>
@@ -9162,8 +9995,8 @@
         </p:nvSpPr>
         <p:spPr>
           <a:xfrm>
-            <a:off x="4023360" y="1691640"/>
-            <a:ext cx="2971800" cy="4526280"/>
+            <a:off x="6309360" y="1664208"/>
+            <a:ext cx="4937760" cy="1965960"/>
           </a:xfrm>
           <a:prstGeom prst="roundRect">
             <a:avLst>
@@ -9209,8 +10042,8 @@
         </p:nvSpPr>
         <p:spPr>
           <a:xfrm>
-            <a:off x="4187952" y="1801368"/>
-            <a:ext cx="2642616" cy="274320"/>
+            <a:off x="6473952" y="1773936"/>
+            <a:ext cx="4608576" cy="274320"/>
           </a:xfrm>
           <a:prstGeom prst="rect">
             <a:avLst/>
@@ -9230,7 +10063,7 @@
                 </a:solidFill>
                 <a:latin typeface="Arial"/>
               </a:rPr>
-              <a:t>Passive pilot</a:t>
+              <a:t>40 CFR Part 434, Subpart C</a:t>
             </a:r>
           </a:p>
         </p:txBody>
@@ -9243,8 +10076,8 @@
         </p:nvSpPr>
         <p:spPr>
           <a:xfrm>
-            <a:off x="4187952" y="2130552"/>
-            <a:ext cx="2642616" cy="3886200"/>
+            <a:off x="6537960" y="2084831"/>
+            <a:ext cx="4480560" cy="1234440"/>
           </a:xfrm>
           <a:prstGeom prst="rect">
             <a:avLst/>
@@ -9263,13 +10096,13 @@
               </a:spcAft>
             </a:pPr>
             <a:r>
-              <a:rPr sz="1500">
+              <a:rPr sz="1400">
                 <a:solidFill>
                   <a:srgbClr val="E5E7EB"/>
                 </a:solidFill>
                 <a:latin typeface="Arial"/>
               </a:rPr>
-              <a:t>Pilot systems used reed beds, aerobic and anaerobic cells, rock filters, and pretreatment options.</a:t>
+              <a:t>Existing-source limits include Fe 7.0 mg/L daily max and 3.5 mg/L average.</a:t>
             </a:r>
           </a:p>
           <a:p>
@@ -9279,13 +10112,13 @@
               </a:spcAft>
             </a:pPr>
             <a:r>
-              <a:rPr sz="1500">
+              <a:rPr sz="1400">
                 <a:solidFill>
                   <a:srgbClr val="E5E7EB"/>
                 </a:solidFill>
                 <a:latin typeface="Arial"/>
               </a:rPr>
-              <a:t>The work showed useful natural attenuation and metal-removal performance.</a:t>
+              <a:t>Mn 4.0 / 2.0 mg/L, TSS 70 / 35 mg/L, and pH between 6.0 and 9.0.</a:t>
             </a:r>
           </a:p>
         </p:txBody>
@@ -9298,8 +10131,8 @@
         </p:nvSpPr>
         <p:spPr>
           <a:xfrm>
-            <a:off x="7360920" y="1691640"/>
-            <a:ext cx="2971800" cy="4526280"/>
+            <a:off x="6309360" y="3794760"/>
+            <a:ext cx="4937760" cy="2350008"/>
           </a:xfrm>
           <a:prstGeom prst="roundRect">
             <a:avLst>
@@ -9345,8 +10178,8 @@
         </p:nvSpPr>
         <p:spPr>
           <a:xfrm>
-            <a:off x="7525512" y="1801368"/>
-            <a:ext cx="2642616" cy="274320"/>
+            <a:off x="6473952" y="3904488"/>
+            <a:ext cx="4608576" cy="274320"/>
           </a:xfrm>
           <a:prstGeom prst="rect">
             <a:avLst/>
@@ -9366,7 +10199,7 @@
                 </a:solidFill>
                 <a:latin typeface="Arial"/>
               </a:rPr>
-              <a:t>Lesson</a:t>
+              <a:t>Iron Mountain enforcement history</a:t>
             </a:r>
           </a:p>
         </p:txBody>
@@ -9379,8 +10212,8 @@
         </p:nvSpPr>
         <p:spPr>
           <a:xfrm>
-            <a:off x="7525512" y="2130552"/>
-            <a:ext cx="2642616" cy="3886200"/>
+            <a:off x="6537960" y="4224528"/>
+            <a:ext cx="4480560" cy="1554480"/>
           </a:xfrm>
           <a:prstGeom prst="rect">
             <a:avLst/>
@@ -9399,13 +10232,13 @@
               </a:spcAft>
             </a:pPr>
             <a:r>
-              <a:rPr sz="1500">
+              <a:rPr sz="1400">
                 <a:solidFill>
                   <a:srgbClr val="E5E7EB"/>
                 </a:solidFill>
                 <a:latin typeface="Arial"/>
               </a:rPr>
-              <a:t>Passive systems were informative but limited by land, plugging, and flow constraints.</a:t>
+              <a:t>California issued waste-discharge requirements in 1977 and an NPDES permit in 1978.</a:t>
             </a:r>
           </a:p>
           <a:p>
@@ -9415,13 +10248,29 @@
               </a:spcAft>
             </a:pPr>
             <a:r>
-              <a:rPr sz="1500">
+              <a:rPr sz="1400">
                 <a:solidFill>
                   <a:srgbClr val="E5E7EB"/>
                 </a:solidFill>
                 <a:latin typeface="Arial"/>
               </a:rPr>
-              <a:t>An active lime plant was still needed to handle the full discharge.</a:t>
+              <a:t>A Cease and Desist Order followed in 1979 after permit violations.</a:t>
+            </a:r>
+          </a:p>
+          <a:p>
+            <a:pPr>
+              <a:spcAft>
+                <a:spcPts val="600"/>
+              </a:spcAft>
+            </a:pPr>
+            <a:r>
+              <a:rPr sz="1400">
+                <a:solidFill>
+                  <a:srgbClr val="E5E7EB"/>
+                </a:solidFill>
+                <a:latin typeface="Arial"/>
+              </a:rPr>
+              <a:t>This makes the regulation story concrete, not just theoretical oversight.</a:t>
             </a:r>
           </a:p>
         </p:txBody>
@@ -9435,7 +10284,42 @@
         <p:spPr>
           <a:xfrm>
             <a:off x="777240" y="5897880"/>
-            <a:ext cx="9144000" cy="228600"/>
+            <a:ext cx="10241280" cy="256032"/>
+          </a:xfrm>
+          <a:prstGeom prst="rect">
+            <a:avLst/>
+          </a:prstGeom>
+          <a:noFill/>
+        </p:spPr>
+        <p:txBody>
+          <a:bodyPr wrap="square">
+            <a:spAutoFit/>
+          </a:bodyPr>
+          <a:lstStyle/>
+          <a:p>
+            <a:pPr algn="l"/>
+            <a:r>
+              <a:rPr sz="1000" b="0">
+                <a:solidFill>
+                  <a:srgbClr val="94A3B8"/>
+                </a:solidFill>
+                <a:latin typeface="Arial"/>
+              </a:rPr>
+              <a:t>Sources: U.S. EPA NPDES overview (2025); eCFR 40 CFR Part 434 (2026); OSMRE SMCRA overview; California State Water Resources Control Board (1982).</a:t>
+            </a:r>
+          </a:p>
+        </p:txBody>
+      </p:sp>
+      <p:sp>
+        <p:nvSpPr>
+          <p:cNvPr id="15" name="TextBox 14"/>
+          <p:cNvSpPr txBox="1"/>
+          <p:nvPr/>
+        </p:nvSpPr>
+        <p:spPr>
+          <a:xfrm>
+            <a:off x="548640" y="6355080"/>
+            <a:ext cx="10972800" cy="228600"/>
           </a:xfrm>
           <a:prstGeom prst="rect">
             <a:avLst/>
@@ -9448,6 +10332,7 @@
           </a:bodyPr>
           <a:lstStyle/>
           <a:p>
+            <a:pPr algn="r"/>
             <a:r>
               <a:rPr sz="1000">
                 <a:solidFill>
@@ -9455,42 +10340,7 @@
                 </a:solidFill>
                 <a:latin typeface="Arial"/>
               </a:rPr>
-              <a:t>Sources: Wheal Jane bioremediation literature and ITRC case-study summary.</a:t>
-            </a:r>
-          </a:p>
-        </p:txBody>
-      </p:sp>
-      <p:sp>
-        <p:nvSpPr>
-          <p:cNvPr id="15" name="TextBox 14"/>
-          <p:cNvSpPr txBox="1"/>
-          <p:nvPr/>
-        </p:nvSpPr>
-        <p:spPr>
-          <a:xfrm>
-            <a:off x="548640" y="6355080"/>
-            <a:ext cx="10972800" cy="228600"/>
-          </a:xfrm>
-          <a:prstGeom prst="rect">
-            <a:avLst/>
-          </a:prstGeom>
-          <a:noFill/>
-        </p:spPr>
-        <p:txBody>
-          <a:bodyPr wrap="none">
-            <a:spAutoFit/>
-          </a:bodyPr>
-          <a:lstStyle/>
-          <a:p>
-            <a:pPr algn="r"/>
-            <a:r>
-              <a:rPr sz="1000">
-                <a:solidFill>
-                  <a:srgbClr val="94A3B8"/>
-                </a:solidFill>
-                <a:latin typeface="Arial"/>
-              </a:rPr>
-              <a:t>AMD draft deck | Slide 9</a:t>
+              <a:t>Group 7 | AMD presentation | Slide 9</a:t>
             </a:r>
           </a:p>
         </p:txBody>
